--- a/internal_doc/00.项目管理/02.制度宣传/2016研发组织结构和制度流程宣传.pptx
+++ b/internal_doc/00.项目管理/02.制度宣传/2016研发组织结构和制度流程宣传.pptx
@@ -213,7 +213,7 @@
             <a:fld id="{28C2289E-693E-47B8-BB40-77D4C037E413}" type="datetimeFigureOut">
               <a:rPr lang="zh-CN" altLang="en-US" smtClean="0"/>
               <a:pPr/>
-              <a:t>2016/2/29</a:t>
+              <a:t>2016/3/3</a:t>
             </a:fld>
             <a:endParaRPr lang="zh-CN" altLang="en-US"/>
           </a:p>
@@ -375,7 +375,7 @@
             <a:fld id="{AC3E46FB-0C22-4315-8E08-4C5C8B3D1168}" type="datetimeFigureOut">
               <a:rPr lang="zh-CN" altLang="en-US" smtClean="0"/>
               <a:pPr/>
-              <a:t>2016/2/29</a:t>
+              <a:t>2016/3/3</a:t>
             </a:fld>
             <a:endParaRPr lang="zh-CN" altLang="en-US"/>
           </a:p>
@@ -2687,15 +2687,7 @@
             </a:r>
             <a:r>
               <a:rPr lang="zh-CN" altLang="en-US" dirty="0" smtClean="0"/>
-              <a:t>研</a:t>
-            </a:r>
-            <a:r>
-              <a:rPr lang="zh-CN" altLang="en-US" dirty="0" smtClean="0"/>
-              <a:t>发</a:t>
-            </a:r>
-            <a:r>
-              <a:rPr lang="zh-CN" altLang="en-US" dirty="0" smtClean="0"/>
-              <a:t>组织结构和制度流程宣传</a:t>
+              <a:t>研发组织结构和制度流程宣传</a:t>
             </a:r>
             <a:endParaRPr lang="zh-CN" altLang="en-US" dirty="0"/>
           </a:p>
@@ -2907,15 +2899,7 @@
           <a:p>
             <a:r>
               <a:rPr lang="zh-CN" altLang="en-US" dirty="0" smtClean="0"/>
-              <a:t>开发</a:t>
-            </a:r>
-            <a:r>
-              <a:rPr lang="zh-CN" altLang="en-US" dirty="0" smtClean="0"/>
-              <a:t>人</a:t>
-            </a:r>
-            <a:r>
-              <a:rPr lang="zh-CN" altLang="en-US" dirty="0" smtClean="0"/>
-              <a:t>员</a:t>
+              <a:t>开发人员</a:t>
             </a:r>
             <a:endParaRPr lang="zh-CN" altLang="en-US" dirty="0"/>
           </a:p>
@@ -3156,11 +3140,7 @@
             </a:r>
             <a:r>
               <a:rPr lang="zh-CN" altLang="en-US" sz="1400" dirty="0" smtClean="0"/>
-              <a:t>、按</a:t>
-            </a:r>
-            <a:r>
-              <a:rPr lang="zh-CN" altLang="en-US" sz="1400" dirty="0" smtClean="0"/>
-              <a:t>照</a:t>
+              <a:t>、按照</a:t>
             </a:r>
             <a:r>
               <a:rPr lang="en-US" altLang="zh-CN" sz="1400" b="1" dirty="0" smtClean="0">
@@ -4262,11 +4242,7 @@
             </a:r>
             <a:r>
               <a:rPr lang="zh-CN" altLang="en-US" sz="1400" dirty="0" smtClean="0"/>
-              <a:t>、</a:t>
-            </a:r>
-            <a:r>
-              <a:rPr lang="zh-CN" altLang="en-US" sz="1400" dirty="0" smtClean="0"/>
-              <a:t>收集客户需求</a:t>
+              <a:t>、收集客户需求</a:t>
             </a:r>
             <a:endParaRPr lang="en-US" altLang="zh-CN" sz="1400" dirty="0" smtClean="0"/>
           </a:p>
@@ -5180,11 +5156,7 @@
             </a:r>
             <a:r>
               <a:rPr lang="zh-CN" altLang="en-US" sz="1200" dirty="0" smtClean="0"/>
-              <a:t>、</a:t>
-            </a:r>
-            <a:r>
-              <a:rPr lang="zh-CN" altLang="en-US" sz="1200" dirty="0" smtClean="0"/>
-              <a:t>汇总问题和需求，起草</a:t>
+              <a:t>、汇总问题和需求，起草</a:t>
             </a:r>
             <a:r>
               <a:rPr lang="en-US" altLang="zh-CN" sz="1200" dirty="0" smtClean="0"/>
@@ -5491,7 +5463,6 @@
               <a:rPr lang="en-US" altLang="zh-CN" sz="1200" dirty="0" smtClean="0"/>
               <a:t>》</a:t>
             </a:r>
-            <a:endParaRPr lang="en-US" altLang="zh-CN" sz="1200" dirty="0" smtClean="0"/>
           </a:p>
         </p:txBody>
       </p:sp>
@@ -6117,15 +6088,7 @@
             </a:r>
             <a:r>
               <a:rPr lang="zh-CN" altLang="en-US" sz="1400" dirty="0" smtClean="0"/>
-              <a:t>、解决技术冲突</a:t>
-            </a:r>
-            <a:r>
-              <a:rPr lang="zh-CN" altLang="en-US" sz="1400" dirty="0" smtClean="0"/>
-              <a:t>仲</a:t>
-            </a:r>
-            <a:r>
-              <a:rPr lang="zh-CN" altLang="en-US" sz="1400" dirty="0" smtClean="0"/>
-              <a:t>裁，需求变更仲裁</a:t>
+              <a:t>、解决技术冲突仲裁，需求变更仲裁</a:t>
             </a:r>
             <a:endParaRPr lang="en-US" altLang="zh-CN" sz="1400" dirty="0" smtClean="0"/>
           </a:p>
@@ -6577,15 +6540,7 @@
             </a:r>
             <a:r>
               <a:rPr lang="zh-CN" altLang="en-US" sz="1400" dirty="0" smtClean="0"/>
-              <a:t>周举行一期（开发和测试分别举行</a:t>
-            </a:r>
-            <a:r>
-              <a:rPr lang="zh-CN" altLang="en-US" sz="1400" dirty="0" smtClean="0"/>
-              <a:t>一</a:t>
-            </a:r>
-            <a:r>
-              <a:rPr lang="zh-CN" altLang="en-US" sz="1400" dirty="0" smtClean="0"/>
-              <a:t>期）</a:t>
+              <a:t>周举行一期（开发和测试分别举行一期）</a:t>
             </a:r>
             <a:endParaRPr lang="en-US" altLang="zh-CN" sz="1400" dirty="0" smtClean="0"/>
           </a:p>
@@ -7052,15 +7007,19 @@
             </a:r>
             <a:r>
               <a:rPr lang="en-US" altLang="zh-CN" sz="1400" dirty="0" smtClean="0"/>
-              <a:t>4</a:t>
-            </a:r>
-            <a:r>
-              <a:rPr lang="en-US" altLang="zh-CN" sz="1400" dirty="0" smtClean="0"/>
-              <a:t>0</a:t>
+              <a:t>40</a:t>
             </a:r>
             <a:r>
               <a:rPr lang="zh-CN" altLang="en-US" sz="1400" dirty="0" smtClean="0"/>
-              <a:t>元标准餐聚，提倡节俭  </a:t>
+              <a:t>元标</a:t>
+            </a:r>
+            <a:r>
+              <a:rPr lang="zh-CN" altLang="en-US" sz="1400" dirty="0" smtClean="0"/>
+              <a:t>准聚餐，</a:t>
+            </a:r>
+            <a:r>
+              <a:rPr lang="zh-CN" altLang="en-US" sz="1400" dirty="0" smtClean="0"/>
+              <a:t>提倡节俭  </a:t>
             </a:r>
             <a:endParaRPr lang="en-US" altLang="zh-CN" sz="1400" dirty="0" smtClean="0"/>
           </a:p>
@@ -7381,7 +7340,7 @@
         </p:nvGraphicFramePr>
         <p:xfrm>
           <a:off x="357160" y="1643050"/>
-          <a:ext cx="8572557" cy="5039360"/>
+          <a:ext cx="8572557" cy="5054600"/>
         </p:xfrm>
         <a:graphic>
           <a:graphicData uri="http://schemas.openxmlformats.org/drawingml/2006/table">
@@ -7390,9 +7349,9 @@
                 <a:tableStyleId>{5C22544A-7EE6-4342-B048-85BDC9FD1C3A}</a:tableStyleId>
               </a:tblPr>
               <a:tblGrid>
-                <a:gridCol w="2857519"/>
-                <a:gridCol w="2857519"/>
-                <a:gridCol w="2857519"/>
+                <a:gridCol w="3357584"/>
+                <a:gridCol w="2428892"/>
+                <a:gridCol w="2786081"/>
               </a:tblGrid>
               <a:tr h="370840">
                 <a:tc>
@@ -7401,10 +7360,10 @@
                     <a:lstStyle/>
                     <a:p>
                       <a:r>
-                        <a:rPr lang="zh-CN" altLang="en-US" dirty="0" smtClean="0"/>
+                        <a:rPr lang="zh-CN" altLang="en-US" sz="1200" dirty="0" smtClean="0"/>
                         <a:t>内容</a:t>
                       </a:r>
-                      <a:endParaRPr lang="zh-CN" altLang="en-US" dirty="0"/>
+                      <a:endParaRPr lang="zh-CN" altLang="en-US" sz="1200" dirty="0"/>
                     </a:p>
                   </a:txBody>
                   <a:tcPr/>
@@ -7415,18 +7374,10 @@
                     <a:lstStyle/>
                     <a:p>
                       <a:r>
-                        <a:rPr lang="zh-CN" altLang="en-US" dirty="0" smtClean="0"/>
-                        <a:t>奖励（</a:t>
-                      </a:r>
-                      <a:r>
                         <a:rPr lang="zh-CN" altLang="en-US" sz="1200" dirty="0" smtClean="0"/>
-                        <a:t>由微信红包方式支付</a:t>
-                      </a:r>
-                      <a:r>
-                        <a:rPr lang="zh-CN" altLang="en-US" dirty="0" smtClean="0"/>
-                        <a:t>）</a:t>
-                      </a:r>
-                      <a:endParaRPr lang="zh-CN" altLang="en-US" dirty="0"/>
+                        <a:t>奖励（由微信红包方式支付）</a:t>
+                      </a:r>
+                      <a:endParaRPr lang="zh-CN" altLang="en-US" sz="1200" dirty="0"/>
                     </a:p>
                   </a:txBody>
                   <a:tcPr/>
@@ -7437,18 +7388,10 @@
                     <a:lstStyle/>
                     <a:p>
                       <a:r>
-                        <a:rPr lang="zh-CN" altLang="en-US" dirty="0" smtClean="0"/>
-                        <a:t>惩罚（</a:t>
-                      </a:r>
-                      <a:r>
-                        <a:rPr lang="zh-CN" altLang="en-US" sz="1400" dirty="0" smtClean="0"/>
-                        <a:t>罚款由微信红包方式交由活动经理用于购买零食水果</a:t>
-                      </a:r>
-                      <a:r>
-                        <a:rPr lang="zh-CN" altLang="en-US" dirty="0" smtClean="0"/>
-                        <a:t>）</a:t>
-                      </a:r>
-                      <a:endParaRPr lang="zh-CN" altLang="en-US" dirty="0"/>
+                        <a:rPr lang="zh-CN" altLang="en-US" sz="1200" dirty="0" smtClean="0"/>
+                        <a:t>惩罚（罚款由微信红包方式交由活动经理用于购买零食水果）</a:t>
+                      </a:r>
+                      <a:endParaRPr lang="zh-CN" altLang="en-US" sz="1200" dirty="0"/>
                     </a:p>
                   </a:txBody>
                   <a:tcPr/>
@@ -7510,7 +7453,11 @@
                     <a:p>
                       <a:r>
                         <a:rPr lang="zh-CN" altLang="en-US" sz="1200" dirty="0" smtClean="0"/>
-                        <a:t>责任人处</a:t>
+                        <a:t>责任人</a:t>
+                      </a:r>
+                      <a:r>
+                        <a:rPr lang="zh-CN" altLang="en-US" sz="1200" dirty="0" smtClean="0"/>
+                        <a:t>处</a:t>
                       </a:r>
                       <a:r>
                         <a:rPr lang="en-US" altLang="zh-CN" sz="1200" dirty="0" smtClean="0"/>
@@ -7590,7 +7537,11 @@
                     <a:p>
                       <a:r>
                         <a:rPr lang="zh-CN" altLang="en-US" sz="1200" dirty="0" smtClean="0"/>
-                        <a:t>责任人处</a:t>
+                        <a:t>责任人</a:t>
+                      </a:r>
+                      <a:r>
+                        <a:rPr lang="zh-CN" altLang="en-US" sz="1200" dirty="0" smtClean="0"/>
+                        <a:t>处</a:t>
                       </a:r>
                       <a:r>
                         <a:rPr lang="en-US" altLang="zh-CN" sz="1200" dirty="0" smtClean="0"/>
@@ -7662,7 +7613,11 @@
                     <a:p>
                       <a:r>
                         <a:rPr lang="zh-CN" altLang="en-US" sz="1200" dirty="0" smtClean="0"/>
-                        <a:t>责任人处</a:t>
+                        <a:t>责任人</a:t>
+                      </a:r>
+                      <a:r>
+                        <a:rPr lang="zh-CN" altLang="en-US" sz="1200" dirty="0" smtClean="0"/>
+                        <a:t>处</a:t>
                       </a:r>
                       <a:r>
                         <a:rPr lang="en-US" altLang="zh-CN" sz="1200" dirty="0" smtClean="0"/>
@@ -7847,6 +7802,70 @@
                       <a:r>
                         <a:rPr lang="zh-CN" altLang="en-US" sz="1200" dirty="0" smtClean="0"/>
                         <a:t>开发经理和测试经理每人处</a:t>
+                      </a:r>
+                      <a:r>
+                        <a:rPr lang="en-US" altLang="zh-CN" sz="1200" dirty="0" smtClean="0"/>
+                        <a:t>20</a:t>
+                      </a:r>
+                      <a:r>
+                        <a:rPr lang="zh-CN" altLang="en-US" sz="1200" dirty="0" smtClean="0"/>
+                        <a:t>元罚款</a:t>
+                      </a:r>
+                      <a:r>
+                        <a:rPr lang="en-US" altLang="zh-CN" sz="1200" dirty="0" smtClean="0"/>
+                        <a:t>/</a:t>
+                      </a:r>
+                      <a:r>
+                        <a:rPr lang="zh-CN" altLang="en-US" sz="1200" dirty="0" smtClean="0"/>
+                        <a:t>次</a:t>
+                      </a:r>
+                      <a:endParaRPr lang="zh-CN" altLang="en-US" sz="1200" dirty="0"/>
+                    </a:p>
+                  </a:txBody>
+                  <a:tcPr/>
+                </a:tc>
+              </a:tr>
+              <a:tr h="370840">
+                <a:tc>
+                  <a:txBody>
+                    <a:bodyPr/>
+                    <a:lstStyle/>
+                    <a:p>
+                      <a:r>
+                        <a:rPr lang="zh-CN" altLang="en-US" sz="1200" dirty="0" smtClean="0"/>
+                        <a:t>开发或测试任务偏离计划</a:t>
+                      </a:r>
+                      <a:r>
+                        <a:rPr lang="en-US" altLang="zh-CN" sz="1200" dirty="0" smtClean="0"/>
+                        <a:t>50%</a:t>
+                      </a:r>
+                      <a:r>
+                        <a:rPr lang="zh-CN" altLang="en-US" sz="1200" dirty="0" smtClean="0"/>
+                        <a:t>或以上未反馈</a:t>
+                      </a:r>
+                      <a:endParaRPr lang="zh-CN" altLang="en-US" sz="1200" dirty="0"/>
+                    </a:p>
+                  </a:txBody>
+                  <a:tcPr/>
+                </a:tc>
+                <a:tc>
+                  <a:txBody>
+                    <a:bodyPr/>
+                    <a:lstStyle/>
+                    <a:p>
+                      <a:endParaRPr lang="zh-CN" altLang="en-US" sz="1200" dirty="0"/>
+                    </a:p>
+                  </a:txBody>
+                  <a:tcPr/>
+                </a:tc>
+                <a:tc>
+                  <a:txBody>
+                    <a:bodyPr/>
+                    <a:lstStyle/>
+                    <a:p>
+                      <a:r>
+                        <a:rPr lang="zh-CN" altLang="en-US" sz="1200" dirty="0" smtClean="0"/>
+                        <a:t>责任人处</a:t>
                       </a:r>
                       <a:r>
                         <a:rPr lang="en-US" altLang="zh-CN" sz="1200" dirty="0" smtClean="0"/>
@@ -7956,11 +7975,15 @@
                     <a:p>
                       <a:r>
                         <a:rPr lang="zh-CN" altLang="en-US" sz="1200" dirty="0" smtClean="0"/>
-                        <a:t>奖励</a:t>
+                        <a:t>奖</a:t>
+                      </a:r>
+                      <a:r>
+                        <a:rPr lang="zh-CN" altLang="en-US" sz="1200" dirty="0" smtClean="0"/>
+                        <a:t>励</a:t>
                       </a:r>
                       <a:r>
                         <a:rPr lang="en-US" altLang="zh-CN" sz="1200" dirty="0" smtClean="0"/>
-                        <a:t>10</a:t>
+                        <a:t>20</a:t>
                       </a:r>
                       <a:r>
                         <a:rPr lang="zh-CN" altLang="en-US" sz="1200" dirty="0" smtClean="0"/>
@@ -8020,11 +8043,15 @@
                     <a:p>
                       <a:r>
                         <a:rPr lang="zh-CN" altLang="en-US" sz="1200" dirty="0" smtClean="0"/>
-                        <a:t>奖励</a:t>
+                        <a:t>奖</a:t>
+                      </a:r>
+                      <a:r>
+                        <a:rPr lang="zh-CN" altLang="en-US" sz="1200" dirty="0" smtClean="0"/>
+                        <a:t>励</a:t>
                       </a:r>
                       <a:r>
                         <a:rPr lang="en-US" altLang="zh-CN" sz="1200" dirty="0" smtClean="0"/>
-                        <a:t>10</a:t>
+                        <a:t>20</a:t>
                       </a:r>
                       <a:r>
                         <a:rPr lang="zh-CN" altLang="en-US" sz="1200" dirty="0" smtClean="0"/>
@@ -8101,11 +8128,15 @@
                       </a:pPr>
                       <a:r>
                         <a:rPr lang="zh-CN" altLang="en-US" sz="1200" dirty="0" smtClean="0"/>
-                        <a:t>奖励</a:t>
+                        <a:t>奖</a:t>
+                      </a:r>
+                      <a:r>
+                        <a:rPr lang="zh-CN" altLang="en-US" sz="1200" dirty="0" smtClean="0"/>
+                        <a:t>励</a:t>
                       </a:r>
                       <a:r>
                         <a:rPr lang="en-US" altLang="zh-CN" sz="1200" dirty="0" smtClean="0"/>
-                        <a:t>10</a:t>
+                        <a:t>20</a:t>
                       </a:r>
                       <a:r>
                         <a:rPr lang="zh-CN" altLang="en-US" sz="1200" dirty="0" smtClean="0"/>
@@ -8462,6 +8493,32 @@
             <a:endParaRPr lang="en-US" altLang="zh-CN" dirty="0" smtClean="0"/>
           </a:p>
           <a:p>
+            <a:r>
+              <a:rPr lang="en-US" altLang="zh-CN" dirty="0" smtClean="0"/>
+              <a:t>CI</a:t>
+            </a:r>
+            <a:r>
+              <a:rPr lang="zh-CN" altLang="en-US" dirty="0" smtClean="0"/>
+              <a:t>地址：</a:t>
+            </a:r>
+            <a:r>
+              <a:rPr lang="en-US" altLang="zh-CN" dirty="0" smtClean="0">
+                <a:hlinkClick r:id="rId5"/>
+              </a:rPr>
+              <a:t>http://192.168.20.200:8080</a:t>
+            </a:r>
+            <a:r>
+              <a:rPr lang="en-US" altLang="zh-CN" dirty="0" smtClean="0">
+                <a:hlinkClick r:id="rId5"/>
+              </a:rPr>
+              <a:t>/</a:t>
+            </a:r>
+            <a:endParaRPr lang="en-US" altLang="zh-CN" dirty="0" smtClean="0"/>
+          </a:p>
+          <a:p>
+            <a:endParaRPr lang="en-US" altLang="zh-CN" dirty="0" smtClean="0"/>
+          </a:p>
+          <a:p>
             <a:endParaRPr lang="zh-CN" altLang="en-US" dirty="0"/>
           </a:p>
         </p:txBody>
@@ -9721,23 +9778,7 @@
                   <a:schemeClr val="tx1"/>
                 </a:solidFill>
               </a:rPr>
-              <a:t>李</a:t>
-            </a:r>
-            <a:r>
-              <a:rPr lang="zh-CN" altLang="en-US" sz="1400" dirty="0" smtClean="0">
-                <a:solidFill>
-                  <a:schemeClr val="tx1"/>
-                </a:solidFill>
-              </a:rPr>
-              <a:t>建</a:t>
-            </a:r>
-            <a:r>
-              <a:rPr lang="zh-CN" altLang="en-US" sz="1400" dirty="0" smtClean="0">
-                <a:solidFill>
-                  <a:schemeClr val="tx1"/>
-                </a:solidFill>
-              </a:rPr>
-              <a:t>华</a:t>
+              <a:t>李建华</a:t>
             </a:r>
             <a:endParaRPr lang="zh-CN" altLang="en-US" sz="1400" dirty="0">
               <a:solidFill>
@@ -10234,7 +10275,11 @@
                     <a:lstStyle/>
                     <a:p>
                       <a:r>
-                        <a:rPr lang="zh-CN" altLang="en-US" sz="1400" dirty="0" smtClean="0"/>
+                        <a:rPr lang="zh-CN" altLang="en-US" sz="1400" b="1" dirty="0" smtClean="0">
+                          <a:solidFill>
+                            <a:srgbClr val="C00000"/>
+                          </a:solidFill>
+                        </a:rPr>
                         <a:t>李伟超</a:t>
                       </a:r>
                       <a:r>
@@ -13476,11 +13521,7 @@
               </a:r>
               <a:r>
                 <a:rPr lang="zh-CN" altLang="en-US" sz="1200" dirty="0" smtClean="0"/>
-                <a:t>，</a:t>
-              </a:r>
-              <a:r>
-                <a:rPr lang="zh-CN" altLang="en-US" sz="1200" dirty="0" smtClean="0"/>
-                <a:t>问题分类分发</a:t>
+                <a:t>，问题分类分发</a:t>
               </a:r>
               <a:endParaRPr lang="zh-CN" altLang="en-US" sz="1200" dirty="0"/>
             </a:p>
@@ -13522,11 +13563,7 @@
             </a:pPr>
             <a:r>
               <a:rPr lang="en-US" altLang="zh-CN" sz="1400" dirty="0" smtClean="0"/>
-              <a:t> </a:t>
-            </a:r>
-            <a:r>
-              <a:rPr lang="en-US" altLang="zh-CN" sz="1400" dirty="0" smtClean="0"/>
-              <a:t>  </a:t>
+              <a:t>   </a:t>
             </a:r>
             <a:r>
               <a:rPr lang="zh-CN" altLang="en-US" sz="1400" dirty="0" smtClean="0"/>
@@ -13572,11 +13609,7 @@
             </a:pPr>
             <a:r>
               <a:rPr lang="en-US" altLang="zh-CN" sz="1400" dirty="0" smtClean="0"/>
-              <a:t> </a:t>
-            </a:r>
-            <a:r>
-              <a:rPr lang="en-US" altLang="zh-CN" sz="1400" dirty="0" smtClean="0"/>
-              <a:t>   </a:t>
+              <a:t>    </a:t>
             </a:r>
             <a:r>
               <a:rPr lang="zh-CN" altLang="en-US" sz="1400" dirty="0" smtClean="0"/>
@@ -13606,11 +13639,7 @@
             </a:pPr>
             <a:r>
               <a:rPr lang="en-US" altLang="zh-CN" sz="1200" dirty="0" smtClean="0"/>
-              <a:t> </a:t>
-            </a:r>
-            <a:r>
-              <a:rPr lang="en-US" altLang="zh-CN" sz="1200" dirty="0" smtClean="0"/>
-              <a:t>  </a:t>
+              <a:t>   </a:t>
             </a:r>
             <a:r>
               <a:rPr lang="zh-CN" altLang="en-US" sz="1200" dirty="0" smtClean="0"/>
@@ -13647,11 +13676,7 @@
             </a:pPr>
             <a:r>
               <a:rPr lang="en-US" altLang="zh-CN" sz="1200" dirty="0" smtClean="0"/>
-              <a:t> </a:t>
-            </a:r>
-            <a:r>
-              <a:rPr lang="en-US" altLang="zh-CN" sz="1200" dirty="0" smtClean="0"/>
-              <a:t>  </a:t>
+              <a:t>   </a:t>
             </a:r>
             <a:r>
               <a:rPr lang="zh-CN" altLang="en-US" sz="1200" dirty="0" smtClean="0"/>
@@ -13687,11 +13712,7 @@
             </a:pPr>
             <a:r>
               <a:rPr lang="en-US" altLang="zh-CN" sz="1400" dirty="0" smtClean="0"/>
-              <a:t> </a:t>
-            </a:r>
-            <a:r>
-              <a:rPr lang="en-US" altLang="zh-CN" sz="1400" dirty="0" smtClean="0"/>
-              <a:t>  </a:t>
+              <a:t>   </a:t>
             </a:r>
             <a:r>
               <a:rPr lang="zh-CN" altLang="en-US" sz="1400" dirty="0" smtClean="0"/>
@@ -14215,11 +14236,6 @@
               </a:rPr>
               <a:t>》</a:t>
             </a:r>
-            <a:endParaRPr lang="en-US" altLang="zh-CN" sz="1200" b="1" dirty="0" smtClean="0">
-              <a:solidFill>
-                <a:srgbClr val="C00000"/>
-              </a:solidFill>
-            </a:endParaRPr>
           </a:p>
         </p:txBody>
       </p:sp>
@@ -15415,11 +15431,7 @@
           <a:p>
             <a:r>
               <a:rPr lang="zh-CN" altLang="en-US" sz="1200" dirty="0" smtClean="0"/>
-              <a:t>根据重现步骤在新旧版本进行测试</a:t>
-            </a:r>
-            <a:r>
-              <a:rPr lang="zh-CN" altLang="en-US" sz="1200" dirty="0" smtClean="0"/>
-              <a:t>，标明测试结果</a:t>
+              <a:t>根据重现步骤在新旧版本进行测试，标明测试结果</a:t>
             </a:r>
             <a:endParaRPr lang="en-US" altLang="zh-CN" sz="1200" dirty="0" smtClean="0"/>
           </a:p>
@@ -16797,15 +16809,7 @@
           <a:p>
             <a:r>
               <a:rPr lang="zh-CN" altLang="en-US" sz="1400" dirty="0" smtClean="0"/>
-              <a:t>开</a:t>
-            </a:r>
-            <a:r>
-              <a:rPr lang="zh-CN" altLang="en-US" sz="1400" dirty="0" smtClean="0"/>
-              <a:t>发经理，</a:t>
-            </a:r>
-            <a:r>
-              <a:rPr lang="zh-CN" altLang="en-US" sz="1400" dirty="0" smtClean="0"/>
-              <a:t>测试经理，开发人员，测试人员参与</a:t>
+              <a:t>开发经理，测试经理，开发人员，测试人员参与</a:t>
             </a:r>
             <a:endParaRPr lang="en-US" altLang="zh-CN" sz="1400" dirty="0" smtClean="0"/>
           </a:p>
@@ -17997,11 +18001,7 @@
             </a:r>
             <a:r>
               <a:rPr lang="zh-CN" altLang="en-US" sz="1400" dirty="0" smtClean="0"/>
-              <a:t>、按</a:t>
-            </a:r>
-            <a:r>
-              <a:rPr lang="zh-CN" altLang="en-US" sz="1400" dirty="0" smtClean="0"/>
-              <a:t>照</a:t>
+              <a:t>、按照</a:t>
             </a:r>
             <a:r>
               <a:rPr lang="en-US" altLang="zh-CN" sz="1400" b="1" dirty="0" smtClean="0">
@@ -18029,11 +18029,7 @@
             </a:r>
             <a:r>
               <a:rPr lang="zh-CN" altLang="en-US" sz="1400" dirty="0" smtClean="0"/>
-              <a:t>编</a:t>
-            </a:r>
-            <a:r>
-              <a:rPr lang="zh-CN" altLang="en-US" sz="1400" dirty="0" smtClean="0"/>
-              <a:t>写用例</a:t>
+              <a:t>编写用例</a:t>
             </a:r>
             <a:endParaRPr lang="en-US" altLang="zh-CN" sz="1400" dirty="0" smtClean="0"/>
           </a:p>
@@ -19154,11 +19150,7 @@
             </a:r>
             <a:r>
               <a:rPr lang="zh-CN" altLang="en-US" sz="1400" dirty="0" smtClean="0"/>
-              <a:t>用例总负责人</a:t>
-            </a:r>
-            <a:r>
-              <a:rPr lang="zh-CN" altLang="en-US" sz="1400" dirty="0" smtClean="0"/>
-              <a:t>：</a:t>
+              <a:t>用例总负责人：</a:t>
             </a:r>
             <a:r>
               <a:rPr lang="zh-CN" altLang="en-US" sz="1400" b="1" dirty="0" smtClean="0">
@@ -19166,15 +19158,7 @@
                   <a:srgbClr val="C00000"/>
                 </a:solidFill>
               </a:rPr>
-              <a:t>测试经理</a:t>
-            </a:r>
-            <a:r>
-              <a:rPr lang="zh-CN" altLang="en-US" sz="1400" b="1" dirty="0" smtClean="0">
-                <a:solidFill>
-                  <a:srgbClr val="C00000"/>
-                </a:solidFill>
-              </a:rPr>
-              <a:t> </a:t>
+              <a:t>测试经理 </a:t>
             </a:r>
             <a:r>
               <a:rPr lang="en-US" altLang="zh-CN" sz="1400" dirty="0" smtClean="0"/>
@@ -19250,11 +19234,7 @@
             </a:r>
             <a:r>
               <a:rPr lang="zh-CN" altLang="en-US" sz="1400" dirty="0" smtClean="0"/>
-              <a:t>开发总负责人</a:t>
-            </a:r>
-            <a:r>
-              <a:rPr lang="zh-CN" altLang="en-US" sz="1400" dirty="0" smtClean="0"/>
-              <a:t>：</a:t>
+              <a:t>开发总负责人：</a:t>
             </a:r>
             <a:r>
               <a:rPr lang="zh-CN" altLang="en-US" sz="1400" b="1" dirty="0" smtClean="0">
@@ -19272,11 +19252,6 @@
               </a:rPr>
               <a:t>]</a:t>
             </a:r>
-            <a:endParaRPr lang="en-US" altLang="zh-CN" sz="1400" dirty="0" smtClean="0">
-              <a:solidFill>
-                <a:schemeClr val="bg1"/>
-              </a:solidFill>
-            </a:endParaRPr>
           </a:p>
         </p:txBody>
       </p:sp>

--- a/internal_doc/00.项目管理/02.制度宣传/2016研发组织结构和制度流程宣传.pptx
+++ b/internal_doc/00.项目管理/02.制度宣传/2016研发组织结构和制度流程宣传.pptx
@@ -3817,12 +3817,20 @@
           <a:lstStyle/>
           <a:p>
             <a:r>
-              <a:rPr lang="zh-CN" altLang="en-US" b="1" dirty="0" smtClean="0">
+              <a:rPr lang="zh-CN" altLang="en-US" b="1" smtClean="0">
                 <a:solidFill>
                   <a:srgbClr val="C00000"/>
                 </a:solidFill>
               </a:rPr>
-              <a:t>版本失代</a:t>
+              <a:t>版</a:t>
+            </a:r>
+            <a:r>
+              <a:rPr lang="zh-CN" altLang="en-US" b="1" smtClean="0">
+                <a:solidFill>
+                  <a:srgbClr val="C00000"/>
+                </a:solidFill>
+              </a:rPr>
+              <a:t>本迭代</a:t>
             </a:r>
             <a:endParaRPr lang="zh-CN" altLang="en-US" b="1" dirty="0">
               <a:solidFill>
@@ -7011,15 +7019,7 @@
             </a:r>
             <a:r>
               <a:rPr lang="zh-CN" altLang="en-US" sz="1400" dirty="0" smtClean="0"/>
-              <a:t>元标</a:t>
-            </a:r>
-            <a:r>
-              <a:rPr lang="zh-CN" altLang="en-US" sz="1400" dirty="0" smtClean="0"/>
-              <a:t>准聚餐，</a:t>
-            </a:r>
-            <a:r>
-              <a:rPr lang="zh-CN" altLang="en-US" sz="1400" dirty="0" smtClean="0"/>
-              <a:t>提倡节俭  </a:t>
+              <a:t>元标准聚餐，提倡节俭  </a:t>
             </a:r>
             <a:endParaRPr lang="en-US" altLang="zh-CN" sz="1400" dirty="0" smtClean="0"/>
           </a:p>
@@ -7453,11 +7453,7 @@
                     <a:p>
                       <a:r>
                         <a:rPr lang="zh-CN" altLang="en-US" sz="1200" dirty="0" smtClean="0"/>
-                        <a:t>责任人</a:t>
-                      </a:r>
-                      <a:r>
-                        <a:rPr lang="zh-CN" altLang="en-US" sz="1200" dirty="0" smtClean="0"/>
-                        <a:t>处</a:t>
+                        <a:t>责任人处</a:t>
                       </a:r>
                       <a:r>
                         <a:rPr lang="en-US" altLang="zh-CN" sz="1200" dirty="0" smtClean="0"/>
@@ -7537,11 +7533,7 @@
                     <a:p>
                       <a:r>
                         <a:rPr lang="zh-CN" altLang="en-US" sz="1200" dirty="0" smtClean="0"/>
-                        <a:t>责任人</a:t>
-                      </a:r>
-                      <a:r>
-                        <a:rPr lang="zh-CN" altLang="en-US" sz="1200" dirty="0" smtClean="0"/>
-                        <a:t>处</a:t>
+                        <a:t>责任人处</a:t>
                       </a:r>
                       <a:r>
                         <a:rPr lang="en-US" altLang="zh-CN" sz="1200" dirty="0" smtClean="0"/>
@@ -7613,11 +7605,7 @@
                     <a:p>
                       <a:r>
                         <a:rPr lang="zh-CN" altLang="en-US" sz="1200" dirty="0" smtClean="0"/>
-                        <a:t>责任人</a:t>
-                      </a:r>
-                      <a:r>
-                        <a:rPr lang="zh-CN" altLang="en-US" sz="1200" dirty="0" smtClean="0"/>
-                        <a:t>处</a:t>
+                        <a:t>责任人处</a:t>
                       </a:r>
                       <a:r>
                         <a:rPr lang="en-US" altLang="zh-CN" sz="1200" dirty="0" smtClean="0"/>
@@ -7975,11 +7963,7 @@
                     <a:p>
                       <a:r>
                         <a:rPr lang="zh-CN" altLang="en-US" sz="1200" dirty="0" smtClean="0"/>
-                        <a:t>奖</a:t>
-                      </a:r>
-                      <a:r>
-                        <a:rPr lang="zh-CN" altLang="en-US" sz="1200" dirty="0" smtClean="0"/>
-                        <a:t>励</a:t>
+                        <a:t>奖励</a:t>
                       </a:r>
                       <a:r>
                         <a:rPr lang="en-US" altLang="zh-CN" sz="1200" dirty="0" smtClean="0"/>
@@ -8043,11 +8027,7 @@
                     <a:p>
                       <a:r>
                         <a:rPr lang="zh-CN" altLang="en-US" sz="1200" dirty="0" smtClean="0"/>
-                        <a:t>奖</a:t>
-                      </a:r>
-                      <a:r>
-                        <a:rPr lang="zh-CN" altLang="en-US" sz="1200" dirty="0" smtClean="0"/>
-                        <a:t>励</a:t>
+                        <a:t>奖励</a:t>
                       </a:r>
                       <a:r>
                         <a:rPr lang="en-US" altLang="zh-CN" sz="1200" dirty="0" smtClean="0"/>
@@ -8128,11 +8108,7 @@
                       </a:pPr>
                       <a:r>
                         <a:rPr lang="zh-CN" altLang="en-US" sz="1200" dirty="0" smtClean="0"/>
-                        <a:t>奖</a:t>
-                      </a:r>
-                      <a:r>
-                        <a:rPr lang="zh-CN" altLang="en-US" sz="1200" dirty="0" smtClean="0"/>
-                        <a:t>励</a:t>
+                        <a:t>奖励</a:t>
                       </a:r>
                       <a:r>
                         <a:rPr lang="en-US" altLang="zh-CN" sz="1200" dirty="0" smtClean="0"/>
@@ -8482,13 +8458,7 @@
               <a:rPr lang="en-US" altLang="zh-CN" dirty="0" smtClean="0">
                 <a:hlinkClick r:id="rId4"/>
               </a:rPr>
-              <a:t>http://</a:t>
-            </a:r>
-            <a:r>
-              <a:rPr lang="en-US" altLang="zh-CN" dirty="0" smtClean="0">
-                <a:hlinkClick r:id="rId4"/>
-              </a:rPr>
-              <a:t>jira:8080</a:t>
+              <a:t>http://jira:8080</a:t>
             </a:r>
             <a:endParaRPr lang="en-US" altLang="zh-CN" dirty="0" smtClean="0"/>
           </a:p>
@@ -8505,13 +8475,7 @@
               <a:rPr lang="en-US" altLang="zh-CN" dirty="0" smtClean="0">
                 <a:hlinkClick r:id="rId5"/>
               </a:rPr>
-              <a:t>http://192.168.20.200:8080</a:t>
-            </a:r>
-            <a:r>
-              <a:rPr lang="en-US" altLang="zh-CN" dirty="0" smtClean="0">
-                <a:hlinkClick r:id="rId5"/>
-              </a:rPr>
-              <a:t>/</a:t>
+              <a:t>http://192.168.20.200:8080/</a:t>
             </a:r>
             <a:endParaRPr lang="en-US" altLang="zh-CN" dirty="0" smtClean="0"/>
           </a:p>

--- a/internal_doc/00.项目管理/02.制度宣传/2016研发组织结构和制度流程宣传.pptx
+++ b/internal_doc/00.项目管理/02.制度宣传/2016研发组织结构和制度流程宣传.pptx
@@ -3822,15 +3822,7 @@
                   <a:srgbClr val="C00000"/>
                 </a:solidFill>
               </a:rPr>
-              <a:t>版</a:t>
-            </a:r>
-            <a:r>
-              <a:rPr lang="zh-CN" altLang="en-US" b="1" smtClean="0">
-                <a:solidFill>
-                  <a:srgbClr val="C00000"/>
-                </a:solidFill>
-              </a:rPr>
-              <a:t>本迭代</a:t>
+              <a:t>版本迭代</a:t>
             </a:r>
             <a:endParaRPr lang="zh-CN" altLang="en-US" b="1" dirty="0">
               <a:solidFill>
@@ -6481,7 +6473,15 @@
             </a:r>
             <a:r>
               <a:rPr lang="zh-CN" altLang="en-US" sz="1400" dirty="0" smtClean="0"/>
-              <a:t>星期的实地“项目演练”，演练通过才能安排过相关项目</a:t>
+              <a:t>星期的实地“项目演练”，演练通过才能安</a:t>
+            </a:r>
+            <a:r>
+              <a:rPr lang="zh-CN" altLang="en-US" sz="1400" dirty="0" smtClean="0"/>
+              <a:t>排到相</a:t>
+            </a:r>
+            <a:r>
+              <a:rPr lang="zh-CN" altLang="en-US" sz="1400" dirty="0" smtClean="0"/>
+              <a:t>关项目</a:t>
             </a:r>
             <a:endParaRPr lang="en-US" altLang="zh-CN" sz="1400" dirty="0" smtClean="0"/>
           </a:p>
@@ -6582,7 +6582,15 @@
             </a:pPr>
             <a:r>
               <a:rPr lang="zh-CN" altLang="en-US" sz="1400" dirty="0" smtClean="0"/>
-              <a:t>分享材料需要规档存放，用于新人学习</a:t>
+              <a:t>分享材料需</a:t>
+            </a:r>
+            <a:r>
+              <a:rPr lang="zh-CN" altLang="en-US" sz="1400" dirty="0" smtClean="0"/>
+              <a:t>要归档</a:t>
+            </a:r>
+            <a:r>
+              <a:rPr lang="zh-CN" altLang="en-US" sz="1400" dirty="0" smtClean="0"/>
+              <a:t>存放，用于新人学习</a:t>
             </a:r>
             <a:endParaRPr lang="en-US" altLang="zh-CN" sz="1400" dirty="0" smtClean="0"/>
           </a:p>
@@ -6649,7 +6657,19 @@
             </a:r>
             <a:r>
               <a:rPr lang="zh-CN" altLang="en-US" sz="1400" dirty="0" smtClean="0"/>
-              <a:t>，包括：月度工作评价、改进点、困难反馈、意见返馈等</a:t>
+              <a:t>，包括：月度工作评价、改进点、困难反馈、</a:t>
+            </a:r>
+            <a:r>
+              <a:rPr lang="zh-CN" altLang="en-US" sz="1400" smtClean="0"/>
+              <a:t>意</a:t>
+            </a:r>
+            <a:r>
+              <a:rPr lang="zh-CN" altLang="en-US" sz="1400" smtClean="0"/>
+              <a:t>见反馈</a:t>
+            </a:r>
+            <a:r>
+              <a:rPr lang="zh-CN" altLang="en-US" sz="1400" dirty="0" smtClean="0"/>
+              <a:t>等</a:t>
             </a:r>
             <a:endParaRPr lang="en-US" altLang="zh-CN" sz="1400" dirty="0" smtClean="0"/>
           </a:p>

--- a/internal_doc/00.项目管理/02.制度宣传/2016研发组织结构和制度流程宣传.pptx
+++ b/internal_doc/00.项目管理/02.制度宣传/2016研发组织结构和制度流程宣传.pptx
@@ -5,10 +5,10 @@
     <p:sldMasterId id="2147483648" r:id="rId1"/>
   </p:sldMasterIdLst>
   <p:notesMasterIdLst>
-    <p:notesMasterId r:id="rId20"/>
+    <p:notesMasterId r:id="rId21"/>
   </p:notesMasterIdLst>
   <p:handoutMasterIdLst>
-    <p:handoutMasterId r:id="rId21"/>
+    <p:handoutMasterId r:id="rId22"/>
   </p:handoutMasterIdLst>
   <p:sldIdLst>
     <p:sldId id="256" r:id="rId2"/>
@@ -26,9 +26,10 @@
     <p:sldId id="281" r:id="rId14"/>
     <p:sldId id="282" r:id="rId15"/>
     <p:sldId id="283" r:id="rId16"/>
-    <p:sldId id="285" r:id="rId17"/>
-    <p:sldId id="275" r:id="rId18"/>
-    <p:sldId id="267" r:id="rId19"/>
+    <p:sldId id="286" r:id="rId17"/>
+    <p:sldId id="285" r:id="rId18"/>
+    <p:sldId id="275" r:id="rId19"/>
+    <p:sldId id="267" r:id="rId20"/>
   </p:sldIdLst>
   <p:sldSz cx="9144000" cy="6858000" type="screen4x3"/>
   <p:notesSz cx="6858000" cy="9144000"/>
@@ -213,7 +214,7 @@
             <a:fld id="{28C2289E-693E-47B8-BB40-77D4C037E413}" type="datetimeFigureOut">
               <a:rPr lang="zh-CN" altLang="en-US" smtClean="0"/>
               <a:pPr/>
-              <a:t>2016/3/3</a:t>
+              <a:t>2016/3/4</a:t>
             </a:fld>
             <a:endParaRPr lang="zh-CN" altLang="en-US"/>
           </a:p>
@@ -375,7 +376,7 @@
             <a:fld id="{AC3E46FB-0C22-4315-8E08-4C5C8B3D1168}" type="datetimeFigureOut">
               <a:rPr lang="zh-CN" altLang="en-US" smtClean="0"/>
               <a:pPr/>
-              <a:t>2016/3/3</a:t>
+              <a:t>2016/3/4</a:t>
             </a:fld>
             <a:endParaRPr lang="zh-CN" altLang="en-US"/>
           </a:p>
@@ -4580,7 +4581,7 @@
         </p:nvSpPr>
         <p:spPr>
           <a:xfrm>
-            <a:off x="7916319" y="2726762"/>
+            <a:off x="7916319" y="2428868"/>
             <a:ext cx="500066" cy="500066"/>
           </a:xfrm>
           <a:prstGeom prst="smileyFace">
@@ -4633,7 +4634,7 @@
         </p:nvSpPr>
         <p:spPr>
           <a:xfrm>
-            <a:off x="7643834" y="2357430"/>
+            <a:off x="7500958" y="2059536"/>
             <a:ext cx="1338828" cy="369332"/>
           </a:xfrm>
           <a:prstGeom prst="rect">
@@ -4663,7 +4664,7 @@
         </p:nvSpPr>
         <p:spPr>
           <a:xfrm>
-            <a:off x="7500958" y="3500438"/>
+            <a:off x="7500958" y="3143248"/>
             <a:ext cx="1285884" cy="500066"/>
           </a:xfrm>
           <a:prstGeom prst="roundRect">
@@ -4729,7 +4730,7 @@
         </p:nvSpPr>
         <p:spPr>
           <a:xfrm>
-            <a:off x="7500958" y="4357694"/>
+            <a:off x="7500958" y="3857628"/>
             <a:ext cx="1285884" cy="500066"/>
           </a:xfrm>
           <a:prstGeom prst="roundRect">
@@ -4795,7 +4796,7 @@
         </p:nvSpPr>
         <p:spPr>
           <a:xfrm>
-            <a:off x="7500958" y="5214950"/>
+            <a:off x="7500958" y="4572008"/>
             <a:ext cx="1285884" cy="500066"/>
           </a:xfrm>
           <a:prstGeom prst="roundRect">
@@ -4861,7 +4862,7 @@
         </p:nvSpPr>
         <p:spPr>
           <a:xfrm>
-            <a:off x="7500958" y="6000768"/>
+            <a:off x="7500958" y="5286388"/>
             <a:ext cx="1285884" cy="500066"/>
           </a:xfrm>
           <a:prstGeom prst="roundRect">
@@ -4919,7 +4920,7 @@
         </p:nvSpPr>
         <p:spPr>
           <a:xfrm>
-            <a:off x="7964598" y="3286124"/>
+            <a:off x="7964598" y="2928934"/>
             <a:ext cx="393616" cy="214314"/>
           </a:xfrm>
           <a:prstGeom prst="downArrow">
@@ -4967,7 +4968,7 @@
         </p:nvSpPr>
         <p:spPr>
           <a:xfrm>
-            <a:off x="7964598" y="4071942"/>
+            <a:off x="7964598" y="3643314"/>
             <a:ext cx="393616" cy="214314"/>
           </a:xfrm>
           <a:prstGeom prst="downArrow">
@@ -5015,7 +5016,7 @@
         </p:nvSpPr>
         <p:spPr>
           <a:xfrm>
-            <a:off x="7964598" y="4929198"/>
+            <a:off x="7964598" y="4357694"/>
             <a:ext cx="393616" cy="214314"/>
           </a:xfrm>
           <a:prstGeom prst="downArrow">
@@ -5063,7 +5064,7 @@
         </p:nvSpPr>
         <p:spPr>
           <a:xfrm>
-            <a:off x="7964598" y="5786454"/>
+            <a:off x="7964598" y="5072074"/>
             <a:ext cx="393616" cy="214314"/>
           </a:xfrm>
           <a:prstGeom prst="downArrow">
@@ -5111,7 +5112,7 @@
         </p:nvSpPr>
         <p:spPr>
           <a:xfrm>
-            <a:off x="4786314" y="2428868"/>
+            <a:off x="4786314" y="2214554"/>
             <a:ext cx="2428892" cy="1143008"/>
           </a:xfrm>
           <a:prstGeom prst="wedgeRoundRectCallout">
@@ -5203,13 +5204,13 @@
         </p:nvSpPr>
         <p:spPr>
           <a:xfrm>
-            <a:off x="4786314" y="4857760"/>
+            <a:off x="4786314" y="4500570"/>
             <a:ext cx="2428892" cy="928694"/>
           </a:xfrm>
           <a:prstGeom prst="wedgeRoundRectCallout">
             <a:avLst>
               <a:gd name="adj1" fmla="val 60439"/>
-              <a:gd name="adj2" fmla="val 19556"/>
+              <a:gd name="adj2" fmla="val -12979"/>
               <a:gd name="adj3" fmla="val 16667"/>
             </a:avLst>
           </a:prstGeom>
@@ -5352,13 +5353,13 @@
         </p:nvSpPr>
         <p:spPr>
           <a:xfrm>
-            <a:off x="4786314" y="3714752"/>
+            <a:off x="4786314" y="3429000"/>
             <a:ext cx="2428892" cy="1000132"/>
           </a:xfrm>
           <a:prstGeom prst="wedgeRoundRectCallout">
             <a:avLst>
-              <a:gd name="adj1" fmla="val 60941"/>
-              <a:gd name="adj2" fmla="val 44207"/>
+              <a:gd name="adj1" fmla="val 59959"/>
+              <a:gd name="adj2" fmla="val 21946"/>
               <a:gd name="adj3" fmla="val 16667"/>
             </a:avLst>
           </a:prstGeom>
@@ -5474,13 +5475,13 @@
         </p:nvSpPr>
         <p:spPr>
           <a:xfrm>
-            <a:off x="4786314" y="5929330"/>
-            <a:ext cx="2428892" cy="571504"/>
+            <a:off x="4786314" y="5500702"/>
+            <a:ext cx="2428892" cy="500066"/>
           </a:xfrm>
           <a:prstGeom prst="wedgeRoundRectCallout">
             <a:avLst>
-              <a:gd name="adj1" fmla="val 60439"/>
-              <a:gd name="adj2" fmla="val 19556"/>
+              <a:gd name="adj1" fmla="val 60766"/>
+              <a:gd name="adj2" fmla="val -40270"/>
               <a:gd name="adj3" fmla="val 16667"/>
             </a:avLst>
           </a:prstGeom>
@@ -5519,7 +5520,222 @@
                   <a:schemeClr val="bg1"/>
                 </a:solidFill>
               </a:rPr>
-              <a:t>根据各环节检验数据确认版本是否发布？</a:t>
+              <a:t>根据各环节检验数</a:t>
+            </a:r>
+            <a:r>
+              <a:rPr lang="zh-CN" altLang="en-US" sz="1200" dirty="0" smtClean="0">
+                <a:solidFill>
+                  <a:schemeClr val="bg1"/>
+                </a:solidFill>
+              </a:rPr>
+              <a:t>据（包括问题单确认）确</a:t>
+            </a:r>
+            <a:r>
+              <a:rPr lang="zh-CN" altLang="en-US" sz="1200" dirty="0" smtClean="0">
+                <a:solidFill>
+                  <a:schemeClr val="bg1"/>
+                </a:solidFill>
+              </a:rPr>
+              <a:t>认版本是否发布？</a:t>
+            </a:r>
+            <a:endParaRPr lang="en-US" altLang="zh-CN" sz="1200" dirty="0" smtClean="0">
+              <a:solidFill>
+                <a:schemeClr val="bg1"/>
+              </a:solidFill>
+            </a:endParaRPr>
+          </a:p>
+        </p:txBody>
+      </p:sp>
+      <p:sp>
+        <p:nvSpPr>
+          <p:cNvPr id="35" name="Rounded Rectangle 34"/>
+          <p:cNvSpPr/>
+          <p:nvPr/>
+        </p:nvSpPr>
+        <p:spPr>
+          <a:xfrm>
+            <a:off x="7500958" y="6000768"/>
+            <a:ext cx="1285884" cy="500066"/>
+          </a:xfrm>
+          <a:prstGeom prst="roundRect">
+            <a:avLst/>
+          </a:prstGeom>
+          <a:solidFill>
+            <a:schemeClr val="accent2">
+              <a:lumMod val="60000"/>
+              <a:lumOff val="40000"/>
+            </a:schemeClr>
+          </a:solidFill>
+          <a:ln>
+            <a:solidFill>
+              <a:schemeClr val="accent2">
+                <a:lumMod val="60000"/>
+                <a:lumOff val="40000"/>
+              </a:schemeClr>
+            </a:solidFill>
+          </a:ln>
+        </p:spPr>
+        <p:style>
+          <a:lnRef idx="2">
+            <a:schemeClr val="accent1">
+              <a:shade val="50000"/>
+            </a:schemeClr>
+          </a:lnRef>
+          <a:fillRef idx="1">
+            <a:schemeClr val="accent1"/>
+          </a:fillRef>
+          <a:effectRef idx="0">
+            <a:schemeClr val="accent1"/>
+          </a:effectRef>
+          <a:fontRef idx="minor">
+            <a:schemeClr val="lt1"/>
+          </a:fontRef>
+        </p:style>
+        <p:txBody>
+          <a:bodyPr rtlCol="0" anchor="ctr"/>
+          <a:lstStyle/>
+          <a:p>
+            <a:pPr algn="ctr"/>
+            <a:r>
+              <a:rPr lang="zh-CN" altLang="en-US" sz="1200" dirty="0" smtClean="0"/>
+              <a:t>版本回顾会议</a:t>
+            </a:r>
+            <a:endParaRPr lang="zh-CN" altLang="en-US" sz="1200" dirty="0"/>
+          </a:p>
+        </p:txBody>
+      </p:sp>
+      <p:sp>
+        <p:nvSpPr>
+          <p:cNvPr id="38" name="Down Arrow 37"/>
+          <p:cNvSpPr/>
+          <p:nvPr/>
+        </p:nvSpPr>
+        <p:spPr>
+          <a:xfrm>
+            <a:off x="8001024" y="5786454"/>
+            <a:ext cx="393616" cy="214314"/>
+          </a:xfrm>
+          <a:prstGeom prst="downArrow">
+            <a:avLst/>
+          </a:prstGeom>
+          <a:solidFill>
+            <a:srgbClr val="0066FF"/>
+          </a:solidFill>
+          <a:ln>
+            <a:solidFill>
+              <a:srgbClr val="0066FF"/>
+            </a:solidFill>
+          </a:ln>
+        </p:spPr>
+        <p:style>
+          <a:lnRef idx="2">
+            <a:schemeClr val="accent1">
+              <a:shade val="50000"/>
+            </a:schemeClr>
+          </a:lnRef>
+          <a:fillRef idx="1">
+            <a:schemeClr val="accent1"/>
+          </a:fillRef>
+          <a:effectRef idx="0">
+            <a:schemeClr val="accent1"/>
+          </a:effectRef>
+          <a:fontRef idx="minor">
+            <a:schemeClr val="lt1"/>
+          </a:fontRef>
+        </p:style>
+        <p:txBody>
+          <a:bodyPr rtlCol="0" anchor="ctr"/>
+          <a:lstStyle/>
+          <a:p>
+            <a:pPr algn="ctr"/>
+            <a:endParaRPr lang="zh-CN" altLang="en-US"/>
+          </a:p>
+        </p:txBody>
+      </p:sp>
+      <p:sp>
+        <p:nvSpPr>
+          <p:cNvPr id="39" name="Rounded Rectangular Callout 38"/>
+          <p:cNvSpPr/>
+          <p:nvPr/>
+        </p:nvSpPr>
+        <p:spPr>
+          <a:xfrm>
+            <a:off x="4786314" y="6072206"/>
+            <a:ext cx="2428892" cy="571504"/>
+          </a:xfrm>
+          <a:prstGeom prst="wedgeRoundRectCallout">
+            <a:avLst>
+              <a:gd name="adj1" fmla="val 60766"/>
+              <a:gd name="adj2" fmla="val -40270"/>
+              <a:gd name="adj3" fmla="val 16667"/>
+            </a:avLst>
+          </a:prstGeom>
+          <a:solidFill>
+            <a:srgbClr val="13C0D7"/>
+          </a:solidFill>
+          <a:ln>
+            <a:solidFill>
+              <a:srgbClr val="13C0D7"/>
+            </a:solidFill>
+          </a:ln>
+        </p:spPr>
+        <p:style>
+          <a:lnRef idx="2">
+            <a:schemeClr val="accent1">
+              <a:shade val="50000"/>
+            </a:schemeClr>
+          </a:lnRef>
+          <a:fillRef idx="1">
+            <a:schemeClr val="accent1"/>
+          </a:fillRef>
+          <a:effectRef idx="0">
+            <a:schemeClr val="accent1"/>
+          </a:effectRef>
+          <a:fontRef idx="minor">
+            <a:schemeClr val="lt1"/>
+          </a:fontRef>
+        </p:style>
+        <p:txBody>
+          <a:bodyPr rtlCol="0" anchor="ctr"/>
+          <a:lstStyle/>
+          <a:p>
+            <a:r>
+              <a:rPr lang="zh-CN" altLang="en-US" sz="1200" dirty="0" smtClean="0">
+                <a:solidFill>
+                  <a:schemeClr val="bg1"/>
+                </a:solidFill>
+              </a:rPr>
+              <a:t>总结版本优秀实践和改进点</a:t>
+            </a:r>
+            <a:endParaRPr lang="en-US" altLang="zh-CN" sz="1200" dirty="0" smtClean="0">
+              <a:solidFill>
+                <a:schemeClr val="bg1"/>
+              </a:solidFill>
+            </a:endParaRPr>
+          </a:p>
+          <a:p>
+            <a:r>
+              <a:rPr lang="zh-CN" altLang="en-US" sz="1200" dirty="0" smtClean="0">
+                <a:solidFill>
+                  <a:schemeClr val="bg1"/>
+                </a:solidFill>
+              </a:rPr>
+              <a:t>总结版本优秀特性，代码，用例</a:t>
+            </a:r>
+            <a:endParaRPr lang="en-US" altLang="zh-CN" sz="1200" dirty="0" smtClean="0">
+              <a:solidFill>
+                <a:schemeClr val="bg1"/>
+              </a:solidFill>
+            </a:endParaRPr>
+          </a:p>
+          <a:p>
+            <a:r>
+              <a:rPr lang="zh-CN" altLang="en-US" sz="1200" dirty="0" smtClean="0">
+                <a:solidFill>
+                  <a:schemeClr val="bg1"/>
+                </a:solidFill>
+              </a:rPr>
+              <a:t>评选版本优秀员工</a:t>
             </a:r>
             <a:endParaRPr lang="en-US" altLang="zh-CN" sz="1200" dirty="0" smtClean="0">
               <a:solidFill>
@@ -6473,15 +6689,7 @@
             </a:r>
             <a:r>
               <a:rPr lang="zh-CN" altLang="en-US" sz="1400" dirty="0" smtClean="0"/>
-              <a:t>星期的实地“项目演练”，演练通过才能安</a:t>
-            </a:r>
-            <a:r>
-              <a:rPr lang="zh-CN" altLang="en-US" sz="1400" dirty="0" smtClean="0"/>
-              <a:t>排到相</a:t>
-            </a:r>
-            <a:r>
-              <a:rPr lang="zh-CN" altLang="en-US" sz="1400" dirty="0" smtClean="0"/>
-              <a:t>关项目</a:t>
+              <a:t>星期的实地“项目演练”，演练通过才能安排到相关项目</a:t>
             </a:r>
             <a:endParaRPr lang="en-US" altLang="zh-CN" sz="1400" dirty="0" smtClean="0"/>
           </a:p>
@@ -6582,15 +6790,7 @@
             </a:pPr>
             <a:r>
               <a:rPr lang="zh-CN" altLang="en-US" sz="1400" dirty="0" smtClean="0"/>
-              <a:t>分享材料需</a:t>
-            </a:r>
-            <a:r>
-              <a:rPr lang="zh-CN" altLang="en-US" sz="1400" dirty="0" smtClean="0"/>
-              <a:t>要归档</a:t>
-            </a:r>
-            <a:r>
-              <a:rPr lang="zh-CN" altLang="en-US" sz="1400" dirty="0" smtClean="0"/>
-              <a:t>存放，用于新人学习</a:t>
+              <a:t>分享材料需要归档存放，用于新人学习</a:t>
             </a:r>
             <a:endParaRPr lang="en-US" altLang="zh-CN" sz="1400" dirty="0" smtClean="0"/>
           </a:p>
@@ -6661,11 +6861,7 @@
             </a:r>
             <a:r>
               <a:rPr lang="zh-CN" altLang="en-US" sz="1400" smtClean="0"/>
-              <a:t>意</a:t>
-            </a:r>
-            <a:r>
-              <a:rPr lang="zh-CN" altLang="en-US" sz="1400" smtClean="0"/>
-              <a:t>见反馈</a:t>
+              <a:t>意见反馈</a:t>
             </a:r>
             <a:r>
               <a:rPr lang="zh-CN" altLang="en-US" sz="1400" dirty="0" smtClean="0"/>
@@ -6727,13 +6923,13 @@
         </p:nvSpPr>
         <p:spPr>
           <a:xfrm>
-            <a:off x="4643438" y="5857892"/>
-            <a:ext cx="4214842" cy="642942"/>
+            <a:off x="4643438" y="5715016"/>
+            <a:ext cx="4214842" cy="1071570"/>
           </a:xfrm>
           <a:prstGeom prst="wedgeRoundRectCallout">
             <a:avLst>
-              <a:gd name="adj1" fmla="val -62825"/>
-              <a:gd name="adj2" fmla="val -17806"/>
+              <a:gd name="adj1" fmla="val -63580"/>
+              <a:gd name="adj2" fmla="val -7532"/>
               <a:gd name="adj3" fmla="val 16667"/>
             </a:avLst>
           </a:prstGeom>
@@ -6774,6 +6970,30 @@
             <a:r>
               <a:rPr lang="zh-CN" altLang="en-US" sz="1400" dirty="0" smtClean="0"/>
               <a:t>？？</a:t>
+            </a:r>
+            <a:endParaRPr lang="en-US" altLang="zh-CN" sz="1400" dirty="0" smtClean="0"/>
+          </a:p>
+          <a:p>
+            <a:pPr marL="342900" indent="-342900"/>
+            <a:r>
+              <a:rPr lang="en-US" altLang="zh-CN" sz="1400" dirty="0" smtClean="0"/>
+              <a:t>1</a:t>
+            </a:r>
+            <a:r>
+              <a:rPr lang="zh-CN" altLang="en-US" sz="1400" dirty="0" smtClean="0"/>
+              <a:t>、收集培训需求，制订月度提升计划，包括对新员工的提升。</a:t>
+            </a:r>
+            <a:endParaRPr lang="en-US" altLang="zh-CN" sz="1400" dirty="0" smtClean="0"/>
+          </a:p>
+          <a:p>
+            <a:pPr marL="342900" indent="-342900"/>
+            <a:r>
+              <a:rPr lang="en-US" altLang="zh-CN" sz="1400" dirty="0" smtClean="0"/>
+              <a:t>2</a:t>
+            </a:r>
+            <a:r>
+              <a:rPr lang="zh-CN" altLang="en-US" sz="1400" dirty="0" smtClean="0"/>
+              <a:t>、收集培训材料并统筹安排。</a:t>
             </a:r>
             <a:endParaRPr lang="en-US" altLang="zh-CN" sz="1400" dirty="0" smtClean="0"/>
           </a:p>
@@ -7031,11 +7251,27 @@
             </a:pPr>
             <a:r>
               <a:rPr lang="zh-CN" altLang="en-US" sz="1400" dirty="0" smtClean="0"/>
-              <a:t>运动后提供每人不高于</a:t>
+              <a:t>运动后提供每</a:t>
+            </a:r>
+            <a:r>
+              <a:rPr lang="zh-CN" altLang="en-US" sz="1400" dirty="0" smtClean="0"/>
+              <a:t>人预算不</a:t>
+            </a:r>
+            <a:r>
+              <a:rPr lang="zh-CN" altLang="en-US" sz="1400" dirty="0" smtClean="0"/>
+              <a:t>高</a:t>
+            </a:r>
+            <a:r>
+              <a:rPr lang="zh-CN" altLang="en-US" sz="1400" dirty="0" smtClean="0"/>
+              <a:t>于</a:t>
             </a:r>
             <a:r>
               <a:rPr lang="en-US" altLang="zh-CN" sz="1400" dirty="0" smtClean="0"/>
-              <a:t>40</a:t>
+              <a:t>6</a:t>
+            </a:r>
+            <a:r>
+              <a:rPr lang="en-US" altLang="zh-CN" sz="1400" dirty="0" smtClean="0"/>
+              <a:t>0</a:t>
             </a:r>
             <a:r>
               <a:rPr lang="zh-CN" altLang="en-US" sz="1400" dirty="0" smtClean="0"/>
@@ -8215,7 +8451,15 @@
           <a:p>
             <a:r>
               <a:rPr lang="zh-CN" altLang="en-US" dirty="0" smtClean="0"/>
-              <a:t>我们的目标是</a:t>
+              <a:t>行为准则</a:t>
+            </a:r>
+            <a:r>
+              <a:rPr lang="en-US" altLang="zh-CN" dirty="0" smtClean="0"/>
+              <a:t>——</a:t>
+            </a:r>
+            <a:r>
+              <a:rPr lang="zh-CN" altLang="en-US" dirty="0" smtClean="0"/>
+              <a:t>从点滴做起，养成良好习惯</a:t>
             </a:r>
             <a:endParaRPr lang="zh-CN" altLang="en-US" dirty="0"/>
           </a:p>
@@ -8229,8 +8473,8 @@
         </p:nvSpPr>
         <p:spPr>
           <a:xfrm>
-            <a:off x="857224" y="2285992"/>
-            <a:ext cx="3429024" cy="500066"/>
+            <a:off x="428596" y="2357430"/>
+            <a:ext cx="3929090" cy="500066"/>
           </a:xfrm>
           <a:prstGeom prst="roundRect">
             <a:avLst/>
@@ -8259,7 +8503,7 @@
             <a:pPr algn="ctr"/>
             <a:r>
               <a:rPr lang="zh-CN" altLang="en-US" dirty="0" smtClean="0"/>
-              <a:t>一流的团队</a:t>
+              <a:t>开会要积极，会议要专注</a:t>
             </a:r>
             <a:endParaRPr lang="zh-CN" altLang="en-US" dirty="0"/>
           </a:p>
@@ -8273,8 +8517,8 @@
         </p:nvSpPr>
         <p:spPr>
           <a:xfrm>
-            <a:off x="2571736" y="3500438"/>
-            <a:ext cx="3429024" cy="500066"/>
+            <a:off x="428596" y="3357562"/>
+            <a:ext cx="3929090" cy="500066"/>
           </a:xfrm>
           <a:prstGeom prst="roundRect">
             <a:avLst/>
@@ -8303,7 +8547,7 @@
             <a:pPr algn="ctr"/>
             <a:r>
               <a:rPr lang="zh-CN" altLang="en-US" dirty="0" smtClean="0"/>
-              <a:t>优秀的产品</a:t>
+              <a:t>会前要准备，会议要高效</a:t>
             </a:r>
             <a:endParaRPr lang="zh-CN" altLang="en-US" dirty="0"/>
           </a:p>
@@ -8317,8 +8561,8 @@
         </p:nvSpPr>
         <p:spPr>
           <a:xfrm>
-            <a:off x="4643438" y="4714884"/>
-            <a:ext cx="3429024" cy="500066"/>
+            <a:off x="428596" y="4357694"/>
+            <a:ext cx="3929090" cy="500066"/>
           </a:xfrm>
           <a:prstGeom prst="roundRect">
             <a:avLst/>
@@ -8347,7 +8591,215 @@
             <a:pPr algn="ctr"/>
             <a:r>
               <a:rPr lang="zh-CN" altLang="en-US" dirty="0" smtClean="0"/>
-              <a:t>快乐工作、健康生活</a:t>
+              <a:t>沟通要平和，分岐要讨论</a:t>
+            </a:r>
+            <a:endParaRPr lang="zh-CN" altLang="en-US" dirty="0"/>
+          </a:p>
+        </p:txBody>
+      </p:sp>
+      <p:sp>
+        <p:nvSpPr>
+          <p:cNvPr id="7" name="Rounded Rectangle 6"/>
+          <p:cNvSpPr/>
+          <p:nvPr/>
+        </p:nvSpPr>
+        <p:spPr>
+          <a:xfrm>
+            <a:off x="4643438" y="2357430"/>
+            <a:ext cx="3929090" cy="500066"/>
+          </a:xfrm>
+          <a:prstGeom prst="roundRect">
+            <a:avLst/>
+          </a:prstGeom>
+          <a:solidFill>
+            <a:srgbClr val="3399FF"/>
+          </a:solidFill>
+          <a:ln>
+            <a:solidFill>
+              <a:srgbClr val="0070C0"/>
+            </a:solidFill>
+          </a:ln>
+        </p:spPr>
+        <p:style>
+          <a:lnRef idx="2">
+            <a:schemeClr val="accent1">
+              <a:shade val="50000"/>
+            </a:schemeClr>
+          </a:lnRef>
+          <a:fillRef idx="1">
+            <a:schemeClr val="accent1"/>
+          </a:fillRef>
+          <a:effectRef idx="0">
+            <a:schemeClr val="accent1"/>
+          </a:effectRef>
+          <a:fontRef idx="minor">
+            <a:schemeClr val="lt1"/>
+          </a:fontRef>
+        </p:style>
+        <p:txBody>
+          <a:bodyPr rtlCol="0" anchor="ctr"/>
+          <a:lstStyle/>
+          <a:p>
+            <a:pPr algn="ctr"/>
+            <a:r>
+              <a:rPr lang="zh-CN" altLang="en-US" dirty="0" smtClean="0"/>
+              <a:t>不打探工资待遇</a:t>
+            </a:r>
+            <a:endParaRPr lang="zh-CN" altLang="en-US" dirty="0"/>
+          </a:p>
+        </p:txBody>
+      </p:sp>
+      <p:sp>
+        <p:nvSpPr>
+          <p:cNvPr id="8" name="Rounded Rectangle 7"/>
+          <p:cNvSpPr/>
+          <p:nvPr/>
+        </p:nvSpPr>
+        <p:spPr>
+          <a:xfrm>
+            <a:off x="4643438" y="3357562"/>
+            <a:ext cx="3929090" cy="500066"/>
+          </a:xfrm>
+          <a:prstGeom prst="roundRect">
+            <a:avLst/>
+          </a:prstGeom>
+          <a:solidFill>
+            <a:srgbClr val="3399FF"/>
+          </a:solidFill>
+          <a:ln>
+            <a:solidFill>
+              <a:srgbClr val="0070C0"/>
+            </a:solidFill>
+          </a:ln>
+        </p:spPr>
+        <p:style>
+          <a:lnRef idx="2">
+            <a:schemeClr val="accent1">
+              <a:shade val="50000"/>
+            </a:schemeClr>
+          </a:lnRef>
+          <a:fillRef idx="1">
+            <a:schemeClr val="accent1"/>
+          </a:fillRef>
+          <a:effectRef idx="0">
+            <a:schemeClr val="accent1"/>
+          </a:effectRef>
+          <a:fontRef idx="minor">
+            <a:schemeClr val="lt1"/>
+          </a:fontRef>
+        </p:style>
+        <p:txBody>
+          <a:bodyPr rtlCol="0" anchor="ctr"/>
+          <a:lstStyle/>
+          <a:p>
+            <a:pPr algn="ctr"/>
+            <a:r>
+              <a:rPr lang="zh-CN" altLang="en-US" dirty="0" smtClean="0"/>
+              <a:t>不传播小道消息</a:t>
+            </a:r>
+            <a:endParaRPr lang="zh-CN" altLang="en-US" dirty="0"/>
+          </a:p>
+        </p:txBody>
+      </p:sp>
+      <p:sp>
+        <p:nvSpPr>
+          <p:cNvPr id="9" name="Rounded Rectangle 8"/>
+          <p:cNvSpPr/>
+          <p:nvPr/>
+        </p:nvSpPr>
+        <p:spPr>
+          <a:xfrm>
+            <a:off x="4643438" y="4357694"/>
+            <a:ext cx="3929090" cy="500066"/>
+          </a:xfrm>
+          <a:prstGeom prst="roundRect">
+            <a:avLst/>
+          </a:prstGeom>
+          <a:solidFill>
+            <a:srgbClr val="3399FF"/>
+          </a:solidFill>
+          <a:ln>
+            <a:solidFill>
+              <a:srgbClr val="0070C0"/>
+            </a:solidFill>
+          </a:ln>
+        </p:spPr>
+        <p:style>
+          <a:lnRef idx="2">
+            <a:schemeClr val="accent1">
+              <a:shade val="50000"/>
+            </a:schemeClr>
+          </a:lnRef>
+          <a:fillRef idx="1">
+            <a:schemeClr val="accent1"/>
+          </a:fillRef>
+          <a:effectRef idx="0">
+            <a:schemeClr val="accent1"/>
+          </a:effectRef>
+          <a:fontRef idx="minor">
+            <a:schemeClr val="lt1"/>
+          </a:fontRef>
+        </p:style>
+        <p:txBody>
+          <a:bodyPr rtlCol="0" anchor="ctr"/>
+          <a:lstStyle/>
+          <a:p>
+            <a:pPr algn="ctr"/>
+            <a:r>
+              <a:rPr lang="zh-CN" altLang="en-US" dirty="0" smtClean="0"/>
+              <a:t>不扩散负面情绪</a:t>
+            </a:r>
+            <a:endParaRPr lang="zh-CN" altLang="en-US" dirty="0"/>
+          </a:p>
+        </p:txBody>
+      </p:sp>
+      <p:sp>
+        <p:nvSpPr>
+          <p:cNvPr id="10" name="Rounded Rectangle 9"/>
+          <p:cNvSpPr/>
+          <p:nvPr/>
+        </p:nvSpPr>
+        <p:spPr>
+          <a:xfrm>
+            <a:off x="2786050" y="5429264"/>
+            <a:ext cx="3429024" cy="500066"/>
+          </a:xfrm>
+          <a:prstGeom prst="roundRect">
+            <a:avLst/>
+          </a:prstGeom>
+          <a:solidFill>
+            <a:srgbClr val="92D050"/>
+          </a:solidFill>
+          <a:ln>
+            <a:solidFill>
+              <a:srgbClr val="339966"/>
+            </a:solidFill>
+          </a:ln>
+        </p:spPr>
+        <p:style>
+          <a:lnRef idx="2">
+            <a:schemeClr val="accent1">
+              <a:shade val="50000"/>
+            </a:schemeClr>
+          </a:lnRef>
+          <a:fillRef idx="1">
+            <a:schemeClr val="accent1"/>
+          </a:fillRef>
+          <a:effectRef idx="0">
+            <a:schemeClr val="accent1"/>
+          </a:effectRef>
+          <a:fontRef idx="minor">
+            <a:schemeClr val="lt1"/>
+          </a:fontRef>
+        </p:style>
+        <p:txBody>
+          <a:bodyPr rtlCol="0" anchor="ctr"/>
+          <a:lstStyle/>
+          <a:p>
+            <a:pPr algn="ctr"/>
+            <a:r>
+              <a:rPr lang="zh-CN" altLang="en-US" dirty="0" smtClean="0"/>
+              <a:t>意见及时沟通反馈</a:t>
             </a:r>
             <a:endParaRPr lang="zh-CN" altLang="en-US" dirty="0"/>
           </a:p>
@@ -8395,7 +8847,7 @@
           <a:p>
             <a:r>
               <a:rPr lang="zh-CN" altLang="en-US" dirty="0" smtClean="0"/>
-              <a:t>附</a:t>
+              <a:t>我们的目标是</a:t>
             </a:r>
             <a:endParaRPr lang="zh-CN" altLang="en-US" dirty="0"/>
           </a:p>
@@ -8403,106 +8855,132 @@
       </p:sp>
       <p:sp>
         <p:nvSpPr>
-          <p:cNvPr id="3" name="Content Placeholder 2"/>
-          <p:cNvSpPr>
-            <a:spLocks noGrp="1"/>
-          </p:cNvSpPr>
-          <p:nvPr>
-            <p:ph idx="1"/>
-          </p:nvPr>
-        </p:nvSpPr>
-        <p:spPr/>
-        <p:txBody>
-          <a:bodyPr/>
-          <a:lstStyle/>
-          <a:p>
+          <p:cNvPr id="4" name="Rounded Rectangle 3"/>
+          <p:cNvSpPr/>
+          <p:nvPr/>
+        </p:nvSpPr>
+        <p:spPr>
+          <a:xfrm>
+            <a:off x="857224" y="2285992"/>
+            <a:ext cx="3429024" cy="500066"/>
+          </a:xfrm>
+          <a:prstGeom prst="roundRect">
+            <a:avLst/>
+          </a:prstGeom>
+        </p:spPr>
+        <p:style>
+          <a:lnRef idx="2">
+            <a:schemeClr val="accent1">
+              <a:shade val="50000"/>
+            </a:schemeClr>
+          </a:lnRef>
+          <a:fillRef idx="1">
+            <a:schemeClr val="accent1"/>
+          </a:fillRef>
+          <a:effectRef idx="0">
+            <a:schemeClr val="accent1"/>
+          </a:effectRef>
+          <a:fontRef idx="minor">
+            <a:schemeClr val="lt1"/>
+          </a:fontRef>
+        </p:style>
+        <p:txBody>
+          <a:bodyPr rtlCol="0" anchor="ctr"/>
+          <a:lstStyle/>
+          <a:p>
+            <a:pPr algn="ctr"/>
             <a:r>
               <a:rPr lang="zh-CN" altLang="en-US" dirty="0" smtClean="0"/>
-              <a:t>外网</a:t>
-            </a:r>
-            <a:r>
-              <a:rPr lang="en-US" altLang="zh-CN" dirty="0" smtClean="0"/>
-              <a:t>PMR</a:t>
-            </a:r>
+              <a:t>一流的团队</a:t>
+            </a:r>
+            <a:endParaRPr lang="zh-CN" altLang="en-US" dirty="0"/>
+          </a:p>
+        </p:txBody>
+      </p:sp>
+      <p:sp>
+        <p:nvSpPr>
+          <p:cNvPr id="5" name="Rounded Rectangle 4"/>
+          <p:cNvSpPr/>
+          <p:nvPr/>
+        </p:nvSpPr>
+        <p:spPr>
+          <a:xfrm>
+            <a:off x="2571736" y="3500438"/>
+            <a:ext cx="3429024" cy="500066"/>
+          </a:xfrm>
+          <a:prstGeom prst="roundRect">
+            <a:avLst/>
+          </a:prstGeom>
+        </p:spPr>
+        <p:style>
+          <a:lnRef idx="2">
+            <a:schemeClr val="accent1">
+              <a:shade val="50000"/>
+            </a:schemeClr>
+          </a:lnRef>
+          <a:fillRef idx="1">
+            <a:schemeClr val="accent1"/>
+          </a:fillRef>
+          <a:effectRef idx="0">
+            <a:schemeClr val="accent1"/>
+          </a:effectRef>
+          <a:fontRef idx="minor">
+            <a:schemeClr val="lt1"/>
+          </a:fontRef>
+        </p:style>
+        <p:txBody>
+          <a:bodyPr rtlCol="0" anchor="ctr"/>
+          <a:lstStyle/>
+          <a:p>
+            <a:pPr algn="ctr"/>
             <a:r>
               <a:rPr lang="zh-CN" altLang="en-US" dirty="0" smtClean="0"/>
-              <a:t>地址：</a:t>
-            </a:r>
-            <a:r>
-              <a:rPr lang="en-US" altLang="zh-CN" dirty="0" smtClean="0">
-                <a:hlinkClick r:id="rId2"/>
-              </a:rPr>
-              <a:t>http://pmr.sequoiadb.com/8181</a:t>
-            </a:r>
-            <a:endParaRPr lang="en-US" altLang="zh-CN" dirty="0" smtClean="0"/>
-          </a:p>
-          <a:p>
+              <a:t>优秀的产品</a:t>
+            </a:r>
+            <a:endParaRPr lang="zh-CN" altLang="en-US" dirty="0"/>
+          </a:p>
+        </p:txBody>
+      </p:sp>
+      <p:sp>
+        <p:nvSpPr>
+          <p:cNvPr id="6" name="Rounded Rectangle 5"/>
+          <p:cNvSpPr/>
+          <p:nvPr/>
+        </p:nvSpPr>
+        <p:spPr>
+          <a:xfrm>
+            <a:off x="4643438" y="4714884"/>
+            <a:ext cx="3429024" cy="500066"/>
+          </a:xfrm>
+          <a:prstGeom prst="roundRect">
+            <a:avLst/>
+          </a:prstGeom>
+        </p:spPr>
+        <p:style>
+          <a:lnRef idx="2">
+            <a:schemeClr val="accent1">
+              <a:shade val="50000"/>
+            </a:schemeClr>
+          </a:lnRef>
+          <a:fillRef idx="1">
+            <a:schemeClr val="accent1"/>
+          </a:fillRef>
+          <a:effectRef idx="0">
+            <a:schemeClr val="accent1"/>
+          </a:effectRef>
+          <a:fontRef idx="minor">
+            <a:schemeClr val="lt1"/>
+          </a:fontRef>
+        </p:style>
+        <p:txBody>
+          <a:bodyPr rtlCol="0" anchor="ctr"/>
+          <a:lstStyle/>
+          <a:p>
+            <a:pPr algn="ctr"/>
             <a:r>
               <a:rPr lang="zh-CN" altLang="en-US" dirty="0" smtClean="0"/>
-              <a:t>外网</a:t>
-            </a:r>
-            <a:r>
-              <a:rPr lang="en-US" altLang="zh-CN" dirty="0" smtClean="0"/>
-              <a:t>Portal</a:t>
-            </a:r>
-            <a:r>
-              <a:rPr lang="zh-CN" altLang="en-US" dirty="0" smtClean="0"/>
-              <a:t>地址：</a:t>
-            </a:r>
-            <a:r>
-              <a:rPr lang="en-US" altLang="zh-CN" dirty="0" smtClean="0">
-                <a:hlinkClick r:id="rId3"/>
-              </a:rPr>
-              <a:t>http://pmr.sequoiadb.com/8090</a:t>
-            </a:r>
-            <a:endParaRPr lang="en-US" altLang="zh-CN" dirty="0" smtClean="0"/>
-          </a:p>
-          <a:p>
-            <a:r>
-              <a:rPr lang="zh-CN" altLang="en-US" dirty="0" smtClean="0"/>
-              <a:t>内网</a:t>
-            </a:r>
-            <a:r>
-              <a:rPr lang="en-US" altLang="zh-CN" dirty="0" smtClean="0"/>
-              <a:t>JIRA</a:t>
-            </a:r>
-            <a:r>
-              <a:rPr lang="zh-CN" altLang="en-US" dirty="0" smtClean="0"/>
-              <a:t>地址：</a:t>
-            </a:r>
-            <a:r>
-              <a:rPr lang="en-US" altLang="zh-CN" dirty="0" smtClean="0"/>
-              <a:t> </a:t>
-            </a:r>
-            <a:r>
-              <a:rPr lang="en-US" altLang="zh-CN" dirty="0" smtClean="0">
-                <a:hlinkClick r:id="rId4"/>
-              </a:rPr>
-              <a:t>http://jira:8080</a:t>
-            </a:r>
-            <a:endParaRPr lang="en-US" altLang="zh-CN" dirty="0" smtClean="0"/>
-          </a:p>
-          <a:p>
-            <a:r>
-              <a:rPr lang="en-US" altLang="zh-CN" dirty="0" smtClean="0"/>
-              <a:t>CI</a:t>
-            </a:r>
-            <a:r>
-              <a:rPr lang="zh-CN" altLang="en-US" dirty="0" smtClean="0"/>
-              <a:t>地址：</a:t>
-            </a:r>
-            <a:r>
-              <a:rPr lang="en-US" altLang="zh-CN" dirty="0" smtClean="0">
-                <a:hlinkClick r:id="rId5"/>
-              </a:rPr>
-              <a:t>http://192.168.20.200:8080/</a:t>
-            </a:r>
-            <a:endParaRPr lang="en-US" altLang="zh-CN" dirty="0" smtClean="0"/>
-          </a:p>
-          <a:p>
-            <a:endParaRPr lang="en-US" altLang="zh-CN" dirty="0" smtClean="0"/>
-          </a:p>
-          <a:p>
+              <a:t>快乐工作、健康生活</a:t>
+            </a:r>
             <a:endParaRPr lang="zh-CN" altLang="en-US" dirty="0"/>
           </a:p>
         </p:txBody>
@@ -8516,6 +8994,160 @@
 </file>
 
 <file path=ppt/slides/slide18.xml><?xml version="1.0" encoding="utf-8"?>
+<p:sld xmlns:a="http://schemas.openxmlformats.org/drawingml/2006/main" xmlns:r="http://schemas.openxmlformats.org/officeDocument/2006/relationships" xmlns:p="http://schemas.openxmlformats.org/presentationml/2006/main">
+  <p:cSld>
+    <p:spTree>
+      <p:nvGrpSpPr>
+        <p:cNvPr id="1" name=""/>
+        <p:cNvGrpSpPr/>
+        <p:nvPr/>
+      </p:nvGrpSpPr>
+      <p:grpSpPr>
+        <a:xfrm>
+          <a:off x="0" y="0"/>
+          <a:ext cx="0" cy="0"/>
+          <a:chOff x="0" y="0"/>
+          <a:chExt cx="0" cy="0"/>
+        </a:xfrm>
+      </p:grpSpPr>
+      <p:sp>
+        <p:nvSpPr>
+          <p:cNvPr id="2" name="Title 1"/>
+          <p:cNvSpPr>
+            <a:spLocks noGrp="1"/>
+          </p:cNvSpPr>
+          <p:nvPr>
+            <p:ph type="title"/>
+          </p:nvPr>
+        </p:nvSpPr>
+        <p:spPr/>
+        <p:txBody>
+          <a:bodyPr/>
+          <a:lstStyle/>
+          <a:p>
+            <a:r>
+              <a:rPr lang="zh-CN" altLang="en-US" dirty="0" smtClean="0"/>
+              <a:t>附</a:t>
+            </a:r>
+            <a:endParaRPr lang="zh-CN" altLang="en-US" dirty="0"/>
+          </a:p>
+        </p:txBody>
+      </p:sp>
+      <p:sp>
+        <p:nvSpPr>
+          <p:cNvPr id="3" name="Content Placeholder 2"/>
+          <p:cNvSpPr>
+            <a:spLocks noGrp="1"/>
+          </p:cNvSpPr>
+          <p:nvPr>
+            <p:ph idx="1"/>
+          </p:nvPr>
+        </p:nvSpPr>
+        <p:spPr/>
+        <p:txBody>
+          <a:bodyPr/>
+          <a:lstStyle/>
+          <a:p>
+            <a:r>
+              <a:rPr lang="zh-CN" altLang="en-US" dirty="0" smtClean="0"/>
+              <a:t>外网</a:t>
+            </a:r>
+            <a:r>
+              <a:rPr lang="en-US" altLang="zh-CN" dirty="0" smtClean="0"/>
+              <a:t>PMR</a:t>
+            </a:r>
+            <a:r>
+              <a:rPr lang="zh-CN" altLang="en-US" dirty="0" smtClean="0"/>
+              <a:t>地址：</a:t>
+            </a:r>
+            <a:r>
+              <a:rPr lang="en-US" altLang="zh-CN" dirty="0" smtClean="0">
+                <a:hlinkClick r:id="rId2"/>
+              </a:rPr>
+              <a:t>http://pmr.sequoiadb.com/8181</a:t>
+            </a:r>
+            <a:endParaRPr lang="en-US" altLang="zh-CN" dirty="0" smtClean="0"/>
+          </a:p>
+          <a:p>
+            <a:r>
+              <a:rPr lang="zh-CN" altLang="en-US" dirty="0" smtClean="0"/>
+              <a:t>外网</a:t>
+            </a:r>
+            <a:r>
+              <a:rPr lang="en-US" altLang="zh-CN" dirty="0" smtClean="0"/>
+              <a:t>Portal</a:t>
+            </a:r>
+            <a:r>
+              <a:rPr lang="zh-CN" altLang="en-US" dirty="0" smtClean="0"/>
+              <a:t>地址：</a:t>
+            </a:r>
+            <a:r>
+              <a:rPr lang="en-US" altLang="zh-CN" dirty="0" smtClean="0">
+                <a:hlinkClick r:id="rId3"/>
+              </a:rPr>
+              <a:t>http://pmr.sequoiadb.com/8090</a:t>
+            </a:r>
+            <a:endParaRPr lang="en-US" altLang="zh-CN" dirty="0" smtClean="0"/>
+          </a:p>
+          <a:p>
+            <a:r>
+              <a:rPr lang="zh-CN" altLang="en-US" dirty="0" smtClean="0"/>
+              <a:t>内网</a:t>
+            </a:r>
+            <a:r>
+              <a:rPr lang="en-US" altLang="zh-CN" dirty="0" smtClean="0"/>
+              <a:t>JIRA</a:t>
+            </a:r>
+            <a:r>
+              <a:rPr lang="zh-CN" altLang="en-US" dirty="0" smtClean="0"/>
+              <a:t>地址：</a:t>
+            </a:r>
+            <a:r>
+              <a:rPr lang="en-US" altLang="zh-CN" dirty="0" smtClean="0"/>
+              <a:t> </a:t>
+            </a:r>
+            <a:r>
+              <a:rPr lang="en-US" altLang="zh-CN" dirty="0" smtClean="0">
+                <a:hlinkClick r:id="rId4"/>
+              </a:rPr>
+              <a:t>http://jira:8080</a:t>
+            </a:r>
+            <a:endParaRPr lang="en-US" altLang="zh-CN" dirty="0" smtClean="0"/>
+          </a:p>
+          <a:p>
+            <a:r>
+              <a:rPr lang="en-US" altLang="zh-CN" dirty="0" smtClean="0"/>
+              <a:t>CI</a:t>
+            </a:r>
+            <a:r>
+              <a:rPr lang="zh-CN" altLang="en-US" dirty="0" smtClean="0"/>
+              <a:t>地址：</a:t>
+            </a:r>
+            <a:r>
+              <a:rPr lang="en-US" altLang="zh-CN" dirty="0" smtClean="0">
+                <a:hlinkClick r:id="rId5"/>
+              </a:rPr>
+              <a:t>http://192.168.20.200:8080/</a:t>
+            </a:r>
+            <a:endParaRPr lang="en-US" altLang="zh-CN" dirty="0" smtClean="0"/>
+          </a:p>
+          <a:p>
+            <a:endParaRPr lang="en-US" altLang="zh-CN" dirty="0" smtClean="0"/>
+          </a:p>
+          <a:p>
+            <a:endParaRPr lang="zh-CN" altLang="en-US" dirty="0"/>
+          </a:p>
+        </p:txBody>
+      </p:sp>
+    </p:spTree>
+  </p:cSld>
+  <p:clrMapOvr>
+    <a:masterClrMapping/>
+  </p:clrMapOvr>
+</p:sld>
+</file>
+
+<file path=ppt/slides/slide19.xml><?xml version="1.0" encoding="utf-8"?>
 <p:sld xmlns:a="http://schemas.openxmlformats.org/drawingml/2006/main" xmlns:r="http://schemas.openxmlformats.org/officeDocument/2006/relationships" xmlns:p="http://schemas.openxmlformats.org/presentationml/2006/main">
   <p:cSld>
     <p:spTree>
@@ -15184,7 +15816,7 @@
           <a:p>
             <a:r>
               <a:rPr lang="zh-CN" altLang="en-US" sz="1200" dirty="0" smtClean="0"/>
-              <a:t>确认问题是否存在，根据分员矩阵进行问题分发</a:t>
+              <a:t>确认问题是否存在，根据人员矩阵进行问题分发</a:t>
             </a:r>
             <a:endParaRPr lang="en-US" altLang="zh-CN" sz="1200" dirty="0" smtClean="0"/>
           </a:p>

--- a/internal_doc/00.项目管理/02.制度宣传/2016研发组织结构和制度流程宣传.pptx
+++ b/internal_doc/00.项目管理/02.制度宣传/2016研发组织结构和制度流程宣传.pptx
@@ -5520,23 +5520,7 @@
                   <a:schemeClr val="bg1"/>
                 </a:solidFill>
               </a:rPr>
-              <a:t>根据各环节检验数</a:t>
-            </a:r>
-            <a:r>
-              <a:rPr lang="zh-CN" altLang="en-US" sz="1200" dirty="0" smtClean="0">
-                <a:solidFill>
-                  <a:schemeClr val="bg1"/>
-                </a:solidFill>
-              </a:rPr>
-              <a:t>据（包括问题单确认）确</a:t>
-            </a:r>
-            <a:r>
-              <a:rPr lang="zh-CN" altLang="en-US" sz="1200" dirty="0" smtClean="0">
-                <a:solidFill>
-                  <a:schemeClr val="bg1"/>
-                </a:solidFill>
-              </a:rPr>
-              <a:t>认版本是否发布？</a:t>
+              <a:t>根据各环节检验数据（包括问题单确认）确认版本是否发布？</a:t>
             </a:r>
             <a:endParaRPr lang="en-US" altLang="zh-CN" sz="1200" dirty="0" smtClean="0">
               <a:solidFill>
@@ -6456,7 +6440,11 @@
             </a:r>
             <a:r>
               <a:rPr lang="zh-CN" altLang="en-US" dirty="0" smtClean="0"/>
-              <a:t>团队建设</a:t>
+              <a:t>团</a:t>
+            </a:r>
+            <a:r>
+              <a:rPr lang="zh-CN" altLang="en-US" dirty="0" smtClean="0"/>
+              <a:t>队技能提升</a:t>
             </a:r>
             <a:endParaRPr lang="zh-CN" altLang="en-US" dirty="0"/>
           </a:p>
@@ -7251,27 +7239,11 @@
             </a:pPr>
             <a:r>
               <a:rPr lang="zh-CN" altLang="en-US" sz="1400" dirty="0" smtClean="0"/>
-              <a:t>运动后提供每</a:t>
-            </a:r>
-            <a:r>
-              <a:rPr lang="zh-CN" altLang="en-US" sz="1400" dirty="0" smtClean="0"/>
-              <a:t>人预算不</a:t>
-            </a:r>
-            <a:r>
-              <a:rPr lang="zh-CN" altLang="en-US" sz="1400" dirty="0" smtClean="0"/>
-              <a:t>高</a:t>
-            </a:r>
-            <a:r>
-              <a:rPr lang="zh-CN" altLang="en-US" sz="1400" dirty="0" smtClean="0"/>
-              <a:t>于</a:t>
+              <a:t>运动后提供每人预算不高于</a:t>
             </a:r>
             <a:r>
               <a:rPr lang="en-US" altLang="zh-CN" sz="1400" dirty="0" smtClean="0"/>
-              <a:t>6</a:t>
-            </a:r>
-            <a:r>
-              <a:rPr lang="en-US" altLang="zh-CN" sz="1400" dirty="0" smtClean="0"/>
-              <a:t>0</a:t>
+              <a:t>60</a:t>
             </a:r>
             <a:r>
               <a:rPr lang="zh-CN" altLang="en-US" sz="1400" dirty="0" smtClean="0"/>

--- a/internal_doc/00.项目管理/02.制度宣传/2016研发组织结构和制度流程宣传.pptx
+++ b/internal_doc/00.项目管理/02.制度宣传/2016研发组织结构和制度流程宣传.pptx
@@ -3660,6 +3660,13 @@
   <p:clrMapOvr>
     <a:masterClrMapping/>
   </p:clrMapOvr>
+  <p:timing>
+    <p:tnLst>
+      <p:par>
+        <p:cTn id="1" dur="indefinite" restart="never" nodeType="tmRoot"/>
+      </p:par>
+    </p:tnLst>
+  </p:timing>
 </p:sld>
 </file>
 
@@ -5734,6 +5741,13 @@
   <p:clrMapOvr>
     <a:masterClrMapping/>
   </p:clrMapOvr>
+  <p:timing>
+    <p:tnLst>
+      <p:par>
+        <p:cTn id="1" dur="indefinite" restart="never" nodeType="tmRoot"/>
+      </p:par>
+    </p:tnLst>
+  </p:timing>
 </p:sld>
 </file>
 
@@ -6395,6 +6409,13 @@
   <p:clrMapOvr>
     <a:masterClrMapping/>
   </p:clrMapOvr>
+  <p:timing>
+    <p:tnLst>
+      <p:par>
+        <p:cTn id="1" dur="indefinite" restart="never" nodeType="tmRoot"/>
+      </p:par>
+    </p:tnLst>
+  </p:timing>
 </p:sld>
 </file>
 
@@ -6440,11 +6461,7 @@
             </a:r>
             <a:r>
               <a:rPr lang="zh-CN" altLang="en-US" dirty="0" smtClean="0"/>
-              <a:t>团</a:t>
-            </a:r>
-            <a:r>
-              <a:rPr lang="zh-CN" altLang="en-US" dirty="0" smtClean="0"/>
-              <a:t>队技能提升</a:t>
+              <a:t>团队技能提升</a:t>
             </a:r>
             <a:endParaRPr lang="zh-CN" altLang="en-US" dirty="0"/>
           </a:p>
@@ -6952,12 +6969,8 @@
           <a:p>
             <a:pPr marL="342900" indent="-342900"/>
             <a:r>
-              <a:rPr lang="en-US" altLang="zh-CN" sz="1400" dirty="0" smtClean="0"/>
-              <a:t>Who</a:t>
-            </a:r>
-            <a:r>
               <a:rPr lang="zh-CN" altLang="en-US" sz="1400" dirty="0" smtClean="0"/>
-              <a:t>？？</a:t>
+              <a:t>李伟超</a:t>
             </a:r>
             <a:endParaRPr lang="en-US" altLang="zh-CN" sz="1400" dirty="0" smtClean="0"/>
           </a:p>
@@ -6992,6 +7005,13 @@
   <p:clrMapOvr>
     <a:masterClrMapping/>
   </p:clrMapOvr>
+  <p:timing>
+    <p:tnLst>
+      <p:par>
+        <p:cTn id="1" dur="indefinite" restart="never" nodeType="tmRoot"/>
+      </p:par>
+    </p:tnLst>
+  </p:timing>
 </p:sld>
 </file>
 
@@ -7491,12 +7511,8 @@
           <a:p>
             <a:pPr marL="342900" indent="-342900"/>
             <a:r>
-              <a:rPr lang="en-US" altLang="zh-CN" sz="1400" dirty="0" smtClean="0"/>
-              <a:t>Who</a:t>
-            </a:r>
-            <a:r>
               <a:rPr lang="zh-CN" altLang="en-US" sz="1400" dirty="0" smtClean="0"/>
-              <a:t>？？</a:t>
+              <a:t>谭钊波</a:t>
             </a:r>
             <a:endParaRPr lang="en-US" altLang="zh-CN" sz="1400" dirty="0" smtClean="0"/>
           </a:p>
@@ -7507,6 +7523,13 @@
   <p:clrMapOvr>
     <a:masterClrMapping/>
   </p:clrMapOvr>
+  <p:timing>
+    <p:tnLst>
+      <p:par>
+        <p:cTn id="1" dur="indefinite" restart="never" nodeType="tmRoot"/>
+      </p:par>
+    </p:tnLst>
+  </p:timing>
 </p:sld>
 </file>
 
@@ -8386,6 +8409,13 @@
   <p:clrMapOvr>
     <a:masterClrMapping/>
   </p:clrMapOvr>
+  <p:timing>
+    <p:tnLst>
+      <p:par>
+        <p:cTn id="1" dur="indefinite" restart="never" nodeType="tmRoot"/>
+      </p:par>
+    </p:tnLst>
+  </p:timing>
 </p:sld>
 </file>
 
@@ -8782,6 +8812,13 @@
   <p:clrMapOvr>
     <a:masterClrMapping/>
   </p:clrMapOvr>
+  <p:timing>
+    <p:tnLst>
+      <p:par>
+        <p:cTn id="1" dur="indefinite" restart="never" nodeType="tmRoot"/>
+      </p:par>
+    </p:tnLst>
+  </p:timing>
 </p:sld>
 </file>
 
@@ -8962,6 +8999,13 @@
   <p:clrMapOvr>
     <a:masterClrMapping/>
   </p:clrMapOvr>
+  <p:timing>
+    <p:tnLst>
+      <p:par>
+        <p:cTn id="1" dur="indefinite" restart="never" nodeType="tmRoot"/>
+      </p:par>
+    </p:tnLst>
+  </p:timing>
 </p:sld>
 </file>
 
@@ -9116,6 +9160,13 @@
   <p:clrMapOvr>
     <a:masterClrMapping/>
   </p:clrMapOvr>
+  <p:timing>
+    <p:tnLst>
+      <p:par>
+        <p:cTn id="1" dur="indefinite" restart="never" nodeType="tmRoot"/>
+      </p:par>
+    </p:tnLst>
+  </p:timing>
 </p:sld>
 </file>
 
@@ -10517,6 +10568,13 @@
   <p:clrMapOvr>
     <a:masterClrMapping/>
   </p:clrMapOvr>
+  <p:timing>
+    <p:tnLst>
+      <p:par>
+        <p:cTn id="1" dur="indefinite" restart="never" nodeType="tmRoot"/>
+      </p:par>
+    </p:tnLst>
+  </p:timing>
 </p:sld>
 </file>
 
@@ -10572,7 +10630,7 @@
         </p:nvGraphicFramePr>
         <p:xfrm>
           <a:off x="457200" y="1785926"/>
-          <a:ext cx="8229599" cy="4729480"/>
+          <a:ext cx="8229599" cy="4942840"/>
         </p:xfrm>
         <a:graphic>
           <a:graphicData uri="http://schemas.openxmlformats.org/drawingml/2006/table">
@@ -11236,7 +11294,11 @@
                       </a:r>
                       <a:r>
                         <a:rPr lang="zh-CN" altLang="en-US" sz="1400" dirty="0" smtClean="0"/>
-                        <a:t>性能测试支撑</a:t>
+                        <a:t>性能测试支</a:t>
+                      </a:r>
+                      <a:r>
+                        <a:rPr lang="zh-CN" altLang="en-US" sz="1400" dirty="0" smtClean="0"/>
+                        <a:t>撑；性能分析</a:t>
                       </a:r>
                       <a:endParaRPr lang="zh-CN" altLang="en-US" sz="1400" dirty="0"/>
                     </a:p>
@@ -11253,6 +11315,13 @@
   <p:clrMapOvr>
     <a:masterClrMapping/>
   </p:clrMapOvr>
+  <p:timing>
+    <p:tnLst>
+      <p:par>
+        <p:cTn id="1" dur="indefinite" restart="never" nodeType="tmRoot"/>
+      </p:par>
+    </p:tnLst>
+  </p:timing>
 </p:sld>
 </file>
 
@@ -11921,6 +11990,13 @@
   <p:clrMapOvr>
     <a:masterClrMapping/>
   </p:clrMapOvr>
+  <p:timing>
+    <p:tnLst>
+      <p:par>
+        <p:cTn id="1" dur="indefinite" restart="never" nodeType="tmRoot"/>
+      </p:par>
+    </p:tnLst>
+  </p:timing>
 </p:sld>
 </file>
 
@@ -13471,6 +13547,13 @@
   <p:clrMapOvr>
     <a:masterClrMapping/>
   </p:clrMapOvr>
+  <p:timing>
+    <p:tnLst>
+      <p:par>
+        <p:cTn id="1" dur="indefinite" restart="never" nodeType="tmRoot"/>
+      </p:par>
+    </p:tnLst>
+  </p:timing>
 </p:sld>
 </file>
 
@@ -19903,6 +19986,13 @@
   <p:clrMapOvr>
     <a:masterClrMapping/>
   </p:clrMapOvr>
+  <p:timing>
+    <p:tnLst>
+      <p:par>
+        <p:cTn id="1" dur="indefinite" restart="never" nodeType="tmRoot"/>
+      </p:par>
+    </p:tnLst>
+  </p:timing>
 </p:sld>
 </file>
 

--- a/internal_doc/00.项目管理/02.制度宣传/2016研发组织结构和制度流程宣传.pptx
+++ b/internal_doc/00.项目管理/02.制度宣传/2016研发组织结构和制度流程宣传.pptx
@@ -214,7 +214,7 @@
             <a:fld id="{28C2289E-693E-47B8-BB40-77D4C037E413}" type="datetimeFigureOut">
               <a:rPr lang="zh-CN" altLang="en-US" smtClean="0"/>
               <a:pPr/>
-              <a:t>2016/3/4</a:t>
+              <a:t>2018/10/9</a:t>
             </a:fld>
             <a:endParaRPr lang="zh-CN" altLang="en-US"/>
           </a:p>
@@ -376,7 +376,7 @@
             <a:fld id="{AC3E46FB-0C22-4315-8E08-4C5C8B3D1168}" type="datetimeFigureOut">
               <a:rPr lang="zh-CN" altLang="en-US" smtClean="0"/>
               <a:pPr/>
-              <a:t>2016/3/4</a:t>
+              <a:t>2018/10/9</a:t>
             </a:fld>
             <a:endParaRPr lang="zh-CN" altLang="en-US"/>
           </a:p>
@@ -9126,24 +9126,87 @@
               <a:rPr lang="en-US" altLang="zh-CN" dirty="0" smtClean="0">
                 <a:hlinkClick r:id="rId4"/>
               </a:rPr>
-              <a:t>http://jira:8080</a:t>
-            </a:r>
-            <a:endParaRPr lang="en-US" altLang="zh-CN" dirty="0" smtClean="0"/>
-          </a:p>
-          <a:p>
+              <a:t>http://</a:t>
+            </a:r>
+            <a:r>
+              <a:rPr lang="en-US" altLang="zh-CN" dirty="0" smtClean="0">
+                <a:hlinkClick r:id="rId4"/>
+              </a:rPr>
+              <a:t>jira:8080</a:t>
+            </a:r>
             <a:r>
               <a:rPr lang="en-US" altLang="zh-CN" dirty="0" smtClean="0"/>
-              <a:t>CI</a:t>
+              <a:t> </a:t>
             </a:r>
             <a:r>
               <a:rPr lang="zh-CN" altLang="en-US" dirty="0" smtClean="0"/>
-              <a:t>地址：</a:t>
+              <a:t>或 </a:t>
             </a:r>
             <a:r>
               <a:rPr lang="en-US" altLang="zh-CN" dirty="0" smtClean="0">
                 <a:hlinkClick r:id="rId5"/>
               </a:rPr>
-              <a:t>http://192.168.20.200:8080/</a:t>
+              <a:t>http://</a:t>
+            </a:r>
+            <a:r>
+              <a:rPr lang="en-US" altLang="zh-CN" dirty="0" smtClean="0">
+                <a:hlinkClick r:id="rId5"/>
+              </a:rPr>
+              <a:t>192.168.10.249:8080</a:t>
+            </a:r>
+            <a:endParaRPr lang="en-US" altLang="zh-CN" dirty="0" smtClean="0"/>
+          </a:p>
+          <a:p>
+            <a:r>
+              <a:rPr lang="en-US" altLang="zh-CN" dirty="0" smtClean="0"/>
+              <a:t>CI</a:t>
+            </a:r>
+            <a:r>
+              <a:rPr lang="zh-CN" altLang="en-US" dirty="0" smtClean="0"/>
+              <a:t>地址</a:t>
+            </a:r>
+            <a:r>
+              <a:rPr lang="zh-CN" altLang="en-US" dirty="0" smtClean="0"/>
+              <a:t>：</a:t>
+            </a:r>
+            <a:r>
+              <a:rPr lang="en-US" altLang="zh-CN" dirty="0" smtClean="0"/>
+              <a:t> </a:t>
+            </a:r>
+            <a:r>
+              <a:rPr lang="en-US" altLang="zh-CN" dirty="0" smtClean="0">
+                <a:hlinkClick r:id="rId6"/>
+              </a:rPr>
+              <a:t>http://192.168.30.185:8080</a:t>
+            </a:r>
+            <a:r>
+              <a:rPr lang="en-US" altLang="zh-CN" dirty="0" smtClean="0">
+                <a:hlinkClick r:id="rId6"/>
+              </a:rPr>
+              <a:t>/</a:t>
+            </a:r>
+            <a:endParaRPr lang="en-US" altLang="zh-CN" dirty="0" smtClean="0"/>
+          </a:p>
+          <a:p>
+            <a:r>
+              <a:rPr lang="en-US" altLang="zh-CN" dirty="0" smtClean="0"/>
+              <a:t>SVN</a:t>
+            </a:r>
+            <a:r>
+              <a:rPr lang="zh-CN" altLang="en-US" dirty="0" smtClean="0"/>
+              <a:t>地址：</a:t>
+            </a:r>
+            <a:r>
+              <a:rPr lang="en-US" altLang="zh-CN" dirty="0" smtClean="0">
+                <a:hlinkClick r:id="rId7"/>
+              </a:rPr>
+              <a:t>http://192.168.20.11:/</a:t>
+            </a:r>
+            <a:r>
+              <a:rPr lang="en-US" altLang="zh-CN" dirty="0" smtClean="0">
+                <a:hlinkClick r:id="rId7"/>
+              </a:rPr>
+              <a:t>sequoiadb/trunk</a:t>
             </a:r>
             <a:endParaRPr lang="en-US" altLang="zh-CN" dirty="0" smtClean="0"/>
           </a:p>
@@ -11294,11 +11357,7 @@
                       </a:r>
                       <a:r>
                         <a:rPr lang="zh-CN" altLang="en-US" sz="1400" dirty="0" smtClean="0"/>
-                        <a:t>性能测试支</a:t>
-                      </a:r>
-                      <a:r>
-                        <a:rPr lang="zh-CN" altLang="en-US" sz="1400" dirty="0" smtClean="0"/>
-                        <a:t>撑；性能分析</a:t>
+                        <a:t>性能测试支撑；性能分析</a:t>
                       </a:r>
                       <a:endParaRPr lang="zh-CN" altLang="en-US" sz="1400" dirty="0"/>
                     </a:p>
